--- a/skaidres/09-22.pptx
+++ b/skaidres/09-22.pptx
@@ -9,33 +9,35 @@
     <p:sldId id="258" r:id="rId3"/>
     <p:sldId id="257" r:id="rId4"/>
     <p:sldId id="259" r:id="rId5"/>
-    <p:sldId id="266" r:id="rId6"/>
-    <p:sldId id="260" r:id="rId7"/>
-    <p:sldId id="261" r:id="rId8"/>
-    <p:sldId id="262" r:id="rId9"/>
-    <p:sldId id="263" r:id="rId10"/>
-    <p:sldId id="264" r:id="rId11"/>
-    <p:sldId id="265" r:id="rId12"/>
-    <p:sldId id="267" r:id="rId13"/>
-    <p:sldId id="268" r:id="rId14"/>
-    <p:sldId id="269" r:id="rId15"/>
-    <p:sldId id="270" r:id="rId16"/>
-    <p:sldId id="271" r:id="rId17"/>
-    <p:sldId id="272" r:id="rId18"/>
-    <p:sldId id="273" r:id="rId19"/>
-    <p:sldId id="280" r:id="rId20"/>
-    <p:sldId id="274" r:id="rId21"/>
-    <p:sldId id="275" r:id="rId22"/>
-    <p:sldId id="282" r:id="rId23"/>
-    <p:sldId id="276" r:id="rId24"/>
-    <p:sldId id="277" r:id="rId25"/>
-    <p:sldId id="278" r:id="rId26"/>
-    <p:sldId id="281" r:id="rId27"/>
-    <p:sldId id="279" r:id="rId28"/>
-    <p:sldId id="283" r:id="rId29"/>
-    <p:sldId id="284" r:id="rId30"/>
-    <p:sldId id="285" r:id="rId31"/>
-    <p:sldId id="286" r:id="rId32"/>
+    <p:sldId id="287" r:id="rId6"/>
+    <p:sldId id="288" r:id="rId7"/>
+    <p:sldId id="266" r:id="rId8"/>
+    <p:sldId id="260" r:id="rId9"/>
+    <p:sldId id="261" r:id="rId10"/>
+    <p:sldId id="262" r:id="rId11"/>
+    <p:sldId id="263" r:id="rId12"/>
+    <p:sldId id="264" r:id="rId13"/>
+    <p:sldId id="265" r:id="rId14"/>
+    <p:sldId id="267" r:id="rId15"/>
+    <p:sldId id="268" r:id="rId16"/>
+    <p:sldId id="269" r:id="rId17"/>
+    <p:sldId id="270" r:id="rId18"/>
+    <p:sldId id="271" r:id="rId19"/>
+    <p:sldId id="272" r:id="rId20"/>
+    <p:sldId id="273" r:id="rId21"/>
+    <p:sldId id="280" r:id="rId22"/>
+    <p:sldId id="274" r:id="rId23"/>
+    <p:sldId id="275" r:id="rId24"/>
+    <p:sldId id="282" r:id="rId25"/>
+    <p:sldId id="276" r:id="rId26"/>
+    <p:sldId id="277" r:id="rId27"/>
+    <p:sldId id="278" r:id="rId28"/>
+    <p:sldId id="281" r:id="rId29"/>
+    <p:sldId id="279" r:id="rId30"/>
+    <p:sldId id="283" r:id="rId31"/>
+    <p:sldId id="284" r:id="rId32"/>
+    <p:sldId id="285" r:id="rId33"/>
+    <p:sldId id="286" r:id="rId34"/>
   </p:sldIdLst>
   <p:sldSz cx="12192000" cy="6858000"/>
   <p:notesSz cx="6858000" cy="9144000"/>
@@ -289,7 +291,7 @@
           <a:p>
             <a:fld id="{01AECE8A-439A-4BCD-A7DC-EFE035EFB41C}" type="datetimeFigureOut">
               <a:rPr lang="en-US" smtClean="0"/>
-              <a:t>9/20/2026</a:t>
+              <a:t>9/22/2026</a:t>
             </a:fld>
             <a:endParaRPr lang="en-US"/>
           </a:p>
@@ -487,7 +489,7 @@
           <a:p>
             <a:fld id="{01AECE8A-439A-4BCD-A7DC-EFE035EFB41C}" type="datetimeFigureOut">
               <a:rPr lang="en-US" smtClean="0"/>
-              <a:t>9/20/2026</a:t>
+              <a:t>9/22/2026</a:t>
             </a:fld>
             <a:endParaRPr lang="en-US"/>
           </a:p>
@@ -695,7 +697,7 @@
           <a:p>
             <a:fld id="{01AECE8A-439A-4BCD-A7DC-EFE035EFB41C}" type="datetimeFigureOut">
               <a:rPr lang="en-US" smtClean="0"/>
-              <a:t>9/20/2026</a:t>
+              <a:t>9/22/2026</a:t>
             </a:fld>
             <a:endParaRPr lang="en-US"/>
           </a:p>
@@ -893,7 +895,7 @@
           <a:p>
             <a:fld id="{01AECE8A-439A-4BCD-A7DC-EFE035EFB41C}" type="datetimeFigureOut">
               <a:rPr lang="en-US" smtClean="0"/>
-              <a:t>9/20/2026</a:t>
+              <a:t>9/22/2026</a:t>
             </a:fld>
             <a:endParaRPr lang="en-US"/>
           </a:p>
@@ -1168,7 +1170,7 @@
           <a:p>
             <a:fld id="{01AECE8A-439A-4BCD-A7DC-EFE035EFB41C}" type="datetimeFigureOut">
               <a:rPr lang="en-US" smtClean="0"/>
-              <a:t>9/20/2026</a:t>
+              <a:t>9/22/2026</a:t>
             </a:fld>
             <a:endParaRPr lang="en-US"/>
           </a:p>
@@ -1433,7 +1435,7 @@
           <a:p>
             <a:fld id="{01AECE8A-439A-4BCD-A7DC-EFE035EFB41C}" type="datetimeFigureOut">
               <a:rPr lang="en-US" smtClean="0"/>
-              <a:t>9/20/2026</a:t>
+              <a:t>9/22/2026</a:t>
             </a:fld>
             <a:endParaRPr lang="en-US"/>
           </a:p>
@@ -1845,7 +1847,7 @@
           <a:p>
             <a:fld id="{01AECE8A-439A-4BCD-A7DC-EFE035EFB41C}" type="datetimeFigureOut">
               <a:rPr lang="en-US" smtClean="0"/>
-              <a:t>9/20/2026</a:t>
+              <a:t>9/22/2026</a:t>
             </a:fld>
             <a:endParaRPr lang="en-US"/>
           </a:p>
@@ -1986,7 +1988,7 @@
           <a:p>
             <a:fld id="{01AECE8A-439A-4BCD-A7DC-EFE035EFB41C}" type="datetimeFigureOut">
               <a:rPr lang="en-US" smtClean="0"/>
-              <a:t>9/20/2026</a:t>
+              <a:t>9/22/2026</a:t>
             </a:fld>
             <a:endParaRPr lang="en-US"/>
           </a:p>
@@ -2099,7 +2101,7 @@
           <a:p>
             <a:fld id="{01AECE8A-439A-4BCD-A7DC-EFE035EFB41C}" type="datetimeFigureOut">
               <a:rPr lang="en-US" smtClean="0"/>
-              <a:t>9/20/2026</a:t>
+              <a:t>9/22/2026</a:t>
             </a:fld>
             <a:endParaRPr lang="en-US"/>
           </a:p>
@@ -2410,7 +2412,7 @@
           <a:p>
             <a:fld id="{01AECE8A-439A-4BCD-A7DC-EFE035EFB41C}" type="datetimeFigureOut">
               <a:rPr lang="en-US" smtClean="0"/>
-              <a:t>9/20/2026</a:t>
+              <a:t>9/22/2026</a:t>
             </a:fld>
             <a:endParaRPr lang="en-US"/>
           </a:p>
@@ -2698,7 +2700,7 @@
           <a:p>
             <a:fld id="{01AECE8A-439A-4BCD-A7DC-EFE035EFB41C}" type="datetimeFigureOut">
               <a:rPr lang="en-US" smtClean="0"/>
-              <a:t>9/20/2026</a:t>
+              <a:t>9/22/2026</a:t>
             </a:fld>
             <a:endParaRPr lang="en-US"/>
           </a:p>
@@ -2939,7 +2941,7 @@
           <a:p>
             <a:fld id="{01AECE8A-439A-4BCD-A7DC-EFE035EFB41C}" type="datetimeFigureOut">
               <a:rPr lang="en-US" smtClean="0"/>
-              <a:t>9/20/2026</a:t>
+              <a:t>9/22/2026</a:t>
             </a:fld>
             <a:endParaRPr lang="en-US"/>
           </a:p>
@@ -3461,7 +3463,7 @@
           <p:cNvPr id="2" name="Title 1">
             <a:extLst>
               <a:ext uri="{FF2B5EF4-FFF2-40B4-BE49-F238E27FC236}">
-                <a16:creationId xmlns:a16="http://schemas.microsoft.com/office/drawing/2014/main" id="{389EAC8E-0E8E-6FC8-73F5-D58AF5CD3612}"/>
+                <a16:creationId xmlns:a16="http://schemas.microsoft.com/office/drawing/2014/main" id="{77709626-6427-3436-F32E-48D5E279B3D1}"/>
               </a:ext>
             </a:extLst>
           </p:cNvPr>
@@ -3479,7 +3481,7 @@
           <a:p>
             <a:r>
               <a:rPr lang="lt-LT" dirty="0"/>
-              <a:t>Dar daugiau terminų:</a:t>
+              <a:t>Keli esminiai terminai, prieš judant toliau</a:t>
             </a:r>
             <a:endParaRPr lang="en-US" dirty="0"/>
           </a:p>
@@ -3490,7 +3492,7 @@
           <p:cNvPr id="3" name="Content Placeholder 2">
             <a:extLst>
               <a:ext uri="{FF2B5EF4-FFF2-40B4-BE49-F238E27FC236}">
-                <a16:creationId xmlns:a16="http://schemas.microsoft.com/office/drawing/2014/main" id="{388F317B-A340-240F-37BF-EE9A2DA40A6E}"/>
+                <a16:creationId xmlns:a16="http://schemas.microsoft.com/office/drawing/2014/main" id="{B93375FC-7F4C-0EBA-AF6F-8C848C4B5F0D}"/>
               </a:ext>
             </a:extLst>
           </p:cNvPr>
@@ -3507,54 +3509,48 @@
           <a:lstStyle/>
           <a:p>
             <a:r>
+              <a:rPr lang="lt-LT" dirty="0"/>
+              <a:t>Instrukcija – kažkas ką liepi kompiuteriui daryti</a:t>
+            </a:r>
+          </a:p>
+          <a:p>
+            <a:r>
+              <a:rPr lang="lt-LT" dirty="0"/>
+              <a:t>Algoritmas – žingsnių rinkinys skirtas išspręsti problemai</a:t>
+            </a:r>
+          </a:p>
+          <a:p>
+            <a:r>
+              <a:rPr lang="lt-LT" dirty="0"/>
+              <a:t>Programa – instrukcijos parašytos kalba kurią kompiuteris gali suprasti ir jas vykdyti.</a:t>
+            </a:r>
+          </a:p>
+          <a:p>
+            <a:r>
               <a:rPr lang="lt-LT" dirty="0" err="1"/>
-              <a:t>Interpreter</a:t>
-            </a:r>
-            <a:r>
-              <a:rPr lang="lt-LT" dirty="0"/>
-              <a:t> – programa, kuri perskaito ir paleidžia instrukcijas</a:t>
-            </a:r>
-          </a:p>
-          <a:p>
-            <a:r>
-              <a:rPr lang="lt-LT" dirty="0"/>
-              <a:t>Terminalas – Vienas iš esminių metodų kaip mes komunikuojame su kompiuteriu</a:t>
-            </a:r>
-          </a:p>
-          <a:p>
-            <a:r>
-              <a:rPr lang="lt-LT" dirty="0"/>
-              <a:t>CPU – </a:t>
-            </a:r>
+              <a:t>Kompiluoti</a:t>
+            </a:r>
+            <a:r>
+              <a:rPr lang="lt-LT" dirty="0"/>
+              <a:t> – surinkti visas instrukcijas ir jas sudėlioti taip, kad kompiuteris galėtų jas suprasti.</a:t>
+            </a:r>
+          </a:p>
+          <a:p>
             <a:r>
               <a:rPr lang="lt-LT" dirty="0" err="1"/>
-              <a:t>Central</a:t>
-            </a:r>
-            <a:r>
-              <a:rPr lang="lt-LT" dirty="0"/>
-              <a:t> </a:t>
+              <a:t>Source</a:t>
+            </a:r>
+            <a:r>
+              <a:rPr lang="lt-LT" dirty="0"/>
+              <a:t> kodas – </a:t>
             </a:r>
             <a:r>
               <a:rPr lang="lt-LT" dirty="0" err="1"/>
-              <a:t>processing</a:t>
-            </a:r>
-            <a:r>
-              <a:rPr lang="lt-LT" dirty="0"/>
-              <a:t> </a:t>
-            </a:r>
-            <a:r>
-              <a:rPr lang="lt-LT" dirty="0" err="1"/>
-              <a:t>unit</a:t>
-            </a:r>
-            <a:r>
-              <a:rPr lang="lt-LT" dirty="0"/>
-              <a:t>. Tai kompiuterio esminės smegenys, kurios atlieka beveik visas mūsų duotas instrukcijas</a:t>
-            </a:r>
-          </a:p>
-          <a:p>
-            <a:r>
-              <a:rPr lang="lt-LT" dirty="0"/>
-              <a:t>RAM – laikinoji atmintis. Laikinai laiko informacija apie programą kurią paleidžiame.</a:t>
+              <a:t>Nekompliuotas</a:t>
+            </a:r>
+            <a:r>
+              <a:rPr lang="lt-LT" dirty="0"/>
+              <a:t> instrukcijų rinkinys, kurį rašo programuotojai.</a:t>
             </a:r>
             <a:endParaRPr lang="en-US" dirty="0"/>
           </a:p>
@@ -3563,7 +3559,7 @@
     </p:spTree>
     <p:extLst>
       <p:ext uri="{BB962C8B-B14F-4D97-AF65-F5344CB8AC3E}">
-        <p14:creationId xmlns:p14="http://schemas.microsoft.com/office/powerpoint/2010/main" val="1127225861"/>
+        <p14:creationId xmlns:p14="http://schemas.microsoft.com/office/powerpoint/2010/main" val="4232621549"/>
       </p:ext>
     </p:extLst>
   </p:cSld>
@@ -3595,7 +3591,7 @@
           <p:cNvPr id="2" name="Title 1">
             <a:extLst>
               <a:ext uri="{FF2B5EF4-FFF2-40B4-BE49-F238E27FC236}">
-                <a16:creationId xmlns:a16="http://schemas.microsoft.com/office/drawing/2014/main" id="{7B1D446B-64C1-3D67-5FEB-59D6A126C330}"/>
+                <a16:creationId xmlns:a16="http://schemas.microsoft.com/office/drawing/2014/main" id="{CC3B7C2F-545F-C22A-B8F5-E13443C090F8}"/>
               </a:ext>
             </a:extLst>
           </p:cNvPr>
@@ -3613,7 +3609,7 @@
           <a:p>
             <a:r>
               <a:rPr lang="lt-LT" dirty="0"/>
-              <a:t>Dabar pasikalbėkime su kompiuteriu</a:t>
+              <a:t>Kas vyksta kai mes paleidžiame programą kompiuteryje?</a:t>
             </a:r>
             <a:endParaRPr lang="en-US" dirty="0"/>
           </a:p>
@@ -3624,7 +3620,7 @@
           <p:cNvPr id="3" name="Content Placeholder 2">
             <a:extLst>
               <a:ext uri="{FF2B5EF4-FFF2-40B4-BE49-F238E27FC236}">
-                <a16:creationId xmlns:a16="http://schemas.microsoft.com/office/drawing/2014/main" id="{ACAD9847-2963-8492-2753-5DAFDC930C63}"/>
+                <a16:creationId xmlns:a16="http://schemas.microsoft.com/office/drawing/2014/main" id="{1D909074-BC32-F6B5-111D-D8681FFCD36A}"/>
               </a:ext>
             </a:extLst>
           </p:cNvPr>
@@ -3637,103 +3633,100 @@
         </p:nvSpPr>
         <p:spPr/>
         <p:txBody>
-          <a:bodyPr/>
-          <a:lstStyle/>
-          <a:p>
-            <a:r>
-              <a:rPr lang="lt-LT" dirty="0"/>
-              <a:t>Dabar tikslas yra duoti </a:t>
-            </a:r>
-            <a:r>
-              <a:rPr lang="lt-LT" dirty="0" err="1"/>
-              <a:t>pythonui</a:t>
-            </a:r>
-            <a:r>
-              <a:rPr lang="lt-LT" dirty="0"/>
-              <a:t> labai paprastas instrukcijas, ir kad </a:t>
-            </a:r>
-            <a:r>
-              <a:rPr lang="lt-LT" dirty="0" err="1"/>
-              <a:t>pythonas</a:t>
-            </a:r>
-            <a:r>
-              <a:rPr lang="lt-LT" dirty="0"/>
-              <a:t> kažką padarytų:</a:t>
-            </a:r>
-          </a:p>
-          <a:p>
-            <a:r>
-              <a:rPr lang="lt-LT" dirty="0"/>
-              <a:t>Atsidarykit </a:t>
-            </a:r>
-            <a:r>
-              <a:rPr lang="lt-LT" dirty="0" err="1"/>
-              <a:t>python</a:t>
-            </a:r>
-            <a:r>
-              <a:rPr lang="lt-LT" dirty="0"/>
-              <a:t>:</a:t>
-            </a:r>
-          </a:p>
-          <a:p>
-            <a:r>
-              <a:rPr lang="lt-LT" dirty="0"/>
-              <a:t>Parašykit </a:t>
-            </a:r>
-            <a:r>
-              <a:rPr lang="lt-LT" dirty="0" err="1"/>
-              <a:t>help</a:t>
-            </a:r>
-            <a:r>
-              <a:rPr lang="lt-LT" dirty="0"/>
-              <a:t> (</a:t>
-            </a:r>
-            <a:r>
-              <a:rPr lang="lt-LT" dirty="0" err="1"/>
-              <a:t>panaviguosim</a:t>
-            </a:r>
-            <a:r>
-              <a:rPr lang="lt-LT" dirty="0"/>
-              <a:t> kartu)</a:t>
-            </a:r>
+          <a:bodyPr>
+            <a:normAutofit fontScale="92500" lnSpcReduction="10000"/>
+          </a:bodyPr>
+          <a:lstStyle/>
+          <a:p>
+            <a:r>
+              <a:rPr lang="lt-LT" dirty="0"/>
+              <a:t>Paprasčiausias modelis kurį reikėtų turėti galvoje yra:</a:t>
+            </a:r>
+          </a:p>
+          <a:p>
+            <a:endParaRPr lang="lt-LT" dirty="0"/>
           </a:p>
           <a:p>
             <a:pPr marL="0" indent="0">
               <a:buNone/>
             </a:pPr>
             <a:r>
-              <a:rPr lang="lt-LT" dirty="0"/>
-              <a:t>Paprasčiausios komandos, kurias patestuosim;</a:t>
-            </a:r>
-          </a:p>
-          <a:p>
-            <a:r>
               <a:rPr lang="lt-LT" dirty="0" err="1"/>
-              <a:t>print</a:t>
-            </a:r>
-            <a:r>
-              <a:rPr lang="lt-LT" dirty="0"/>
-              <a:t>()</a:t>
-            </a:r>
-          </a:p>
-          <a:p>
-            <a:r>
-              <a:rPr lang="lt-LT" dirty="0"/>
-              <a:t>Paprasta matematika (</a:t>
-            </a:r>
-            <a:r>
-              <a:rPr lang="en-US" dirty="0"/>
-              <a:t>+ - / *)</a:t>
-            </a:r>
-            <a:endParaRPr lang="lt-LT" dirty="0"/>
+              <a:t>Source</a:t>
+            </a:r>
+            <a:r>
+              <a:rPr lang="lt-LT" dirty="0"/>
+              <a:t> kodas </a:t>
+            </a:r>
           </a:p>
           <a:p>
             <a:pPr marL="0" indent="0">
               <a:buNone/>
             </a:pPr>
+            <a:r>
+              <a:rPr lang="en-US" dirty="0"/>
+              <a:t>↓</a:t>
+            </a:r>
             <a:endParaRPr lang="lt-LT" dirty="0"/>
           </a:p>
           <a:p>
+            <a:pPr marL="0" indent="0">
+              <a:buNone/>
+            </a:pPr>
+            <a:r>
+              <a:rPr lang="lt-LT" dirty="0" err="1"/>
+              <a:t>Pythonas</a:t>
+            </a:r>
+            <a:r>
+              <a:rPr lang="lt-LT" dirty="0"/>
+              <a:t> perskaito ir interpretuoja instrukcijas (</a:t>
+            </a:r>
+            <a:r>
+              <a:rPr lang="lt-LT" dirty="0" err="1"/>
+              <a:t>kompiluoja</a:t>
+            </a:r>
+            <a:r>
+              <a:rPr lang="lt-LT" dirty="0"/>
+              <a:t> jas kompiuteriui suprantama kalba)</a:t>
+            </a:r>
+          </a:p>
+          <a:p>
+            <a:pPr marL="0" indent="0">
+              <a:buNone/>
+            </a:pPr>
+            <a:r>
+              <a:rPr lang="en-US" dirty="0"/>
+              <a:t>↓</a:t>
+            </a:r>
+            <a:endParaRPr lang="lt-LT" dirty="0"/>
+          </a:p>
+          <a:p>
+            <a:pPr marL="0" indent="0">
+              <a:buNone/>
+            </a:pPr>
+            <a:r>
+              <a:rPr lang="lt-LT" dirty="0"/>
+              <a:t> Kompiuteris vykdo instrukcijas</a:t>
+            </a:r>
+          </a:p>
+          <a:p>
+            <a:pPr marL="0" indent="0">
+              <a:buNone/>
+            </a:pPr>
+            <a:r>
+              <a:rPr lang="en-US" dirty="0"/>
+              <a:t>↓</a:t>
+            </a:r>
+            <a:endParaRPr lang="lt-LT" dirty="0"/>
+          </a:p>
+          <a:p>
+            <a:pPr marL="0" indent="0">
+              <a:buNone/>
+            </a:pPr>
+            <a:r>
+              <a:rPr lang="lt-LT" dirty="0"/>
+              <a:t> Kažkas įvyksta</a:t>
+            </a:r>
             <a:endParaRPr lang="en-US" dirty="0"/>
           </a:p>
         </p:txBody>
@@ -3741,7 +3734,7 @@
     </p:spTree>
     <p:extLst>
       <p:ext uri="{BB962C8B-B14F-4D97-AF65-F5344CB8AC3E}">
-        <p14:creationId xmlns:p14="http://schemas.microsoft.com/office/powerpoint/2010/main" val="626466560"/>
+        <p14:creationId xmlns:p14="http://schemas.microsoft.com/office/powerpoint/2010/main" val="1036092298"/>
       </p:ext>
     </p:extLst>
   </p:cSld>
@@ -3773,6 +3766,318 @@
           <p:cNvPr id="2" name="Title 1">
             <a:extLst>
               <a:ext uri="{FF2B5EF4-FFF2-40B4-BE49-F238E27FC236}">
+                <a16:creationId xmlns:a16="http://schemas.microsoft.com/office/drawing/2014/main" id="{389EAC8E-0E8E-6FC8-73F5-D58AF5CD3612}"/>
+              </a:ext>
+            </a:extLst>
+          </p:cNvPr>
+          <p:cNvSpPr>
+            <a:spLocks noGrp="1"/>
+          </p:cNvSpPr>
+          <p:nvPr>
+            <p:ph type="title"/>
+          </p:nvPr>
+        </p:nvSpPr>
+        <p:spPr/>
+        <p:txBody>
+          <a:bodyPr/>
+          <a:lstStyle/>
+          <a:p>
+            <a:r>
+              <a:rPr lang="lt-LT" dirty="0"/>
+              <a:t>Dar daugiau terminų:</a:t>
+            </a:r>
+            <a:endParaRPr lang="en-US" dirty="0"/>
+          </a:p>
+        </p:txBody>
+      </p:sp>
+      <p:sp>
+        <p:nvSpPr>
+          <p:cNvPr id="3" name="Content Placeholder 2">
+            <a:extLst>
+              <a:ext uri="{FF2B5EF4-FFF2-40B4-BE49-F238E27FC236}">
+                <a16:creationId xmlns:a16="http://schemas.microsoft.com/office/drawing/2014/main" id="{388F317B-A340-240F-37BF-EE9A2DA40A6E}"/>
+              </a:ext>
+            </a:extLst>
+          </p:cNvPr>
+          <p:cNvSpPr>
+            <a:spLocks noGrp="1"/>
+          </p:cNvSpPr>
+          <p:nvPr>
+            <p:ph idx="1"/>
+          </p:nvPr>
+        </p:nvSpPr>
+        <p:spPr/>
+        <p:txBody>
+          <a:bodyPr/>
+          <a:lstStyle/>
+          <a:p>
+            <a:r>
+              <a:rPr lang="lt-LT" dirty="0" err="1"/>
+              <a:t>Interpreter</a:t>
+            </a:r>
+            <a:r>
+              <a:rPr lang="lt-LT" dirty="0"/>
+              <a:t> – programa, kuri perskaito ir paleidžia instrukcijas</a:t>
+            </a:r>
+          </a:p>
+          <a:p>
+            <a:r>
+              <a:rPr lang="lt-LT" dirty="0"/>
+              <a:t>Terminalas – Vienas iš esminių metodų kaip mes komunikuojame su kompiuteriu</a:t>
+            </a:r>
+          </a:p>
+          <a:p>
+            <a:r>
+              <a:rPr lang="lt-LT" dirty="0"/>
+              <a:t>CPU – </a:t>
+            </a:r>
+            <a:r>
+              <a:rPr lang="lt-LT" dirty="0" err="1"/>
+              <a:t>Central</a:t>
+            </a:r>
+            <a:r>
+              <a:rPr lang="lt-LT" dirty="0"/>
+              <a:t> </a:t>
+            </a:r>
+            <a:r>
+              <a:rPr lang="lt-LT" dirty="0" err="1"/>
+              <a:t>processing</a:t>
+            </a:r>
+            <a:r>
+              <a:rPr lang="lt-LT" dirty="0"/>
+              <a:t> </a:t>
+            </a:r>
+            <a:r>
+              <a:rPr lang="lt-LT" dirty="0" err="1"/>
+              <a:t>unit</a:t>
+            </a:r>
+            <a:r>
+              <a:rPr lang="lt-LT" dirty="0"/>
+              <a:t>. Tai kompiuterio esminės smegenys, kurios atlieka beveik visas mūsų duotas instrukcijas</a:t>
+            </a:r>
+          </a:p>
+          <a:p>
+            <a:r>
+              <a:rPr lang="lt-LT" dirty="0"/>
+              <a:t>RAM – laikinoji atmintis. Laikinai laiko informacija apie programą kurią paleidžiame.</a:t>
+            </a:r>
+            <a:endParaRPr lang="en-US" dirty="0"/>
+          </a:p>
+        </p:txBody>
+      </p:sp>
+    </p:spTree>
+    <p:extLst>
+      <p:ext uri="{BB962C8B-B14F-4D97-AF65-F5344CB8AC3E}">
+        <p14:creationId xmlns:p14="http://schemas.microsoft.com/office/powerpoint/2010/main" val="1127225861"/>
+      </p:ext>
+    </p:extLst>
+  </p:cSld>
+  <p:clrMapOvr>
+    <a:masterClrMapping/>
+  </p:clrMapOvr>
+</p:sld>
+</file>
+
+<file path=ppt/slides/slide13.xml><?xml version="1.0" encoding="utf-8"?>
+<p:sld xmlns:a="http://schemas.openxmlformats.org/drawingml/2006/main" xmlns:r="http://schemas.openxmlformats.org/officeDocument/2006/relationships" xmlns:p="http://schemas.openxmlformats.org/presentationml/2006/main">
+  <p:cSld>
+    <p:spTree>
+      <p:nvGrpSpPr>
+        <p:cNvPr id="1" name=""/>
+        <p:cNvGrpSpPr/>
+        <p:nvPr/>
+      </p:nvGrpSpPr>
+      <p:grpSpPr>
+        <a:xfrm>
+          <a:off x="0" y="0"/>
+          <a:ext cx="0" cy="0"/>
+          <a:chOff x="0" y="0"/>
+          <a:chExt cx="0" cy="0"/>
+        </a:xfrm>
+      </p:grpSpPr>
+      <p:sp>
+        <p:nvSpPr>
+          <p:cNvPr id="2" name="Title 1">
+            <a:extLst>
+              <a:ext uri="{FF2B5EF4-FFF2-40B4-BE49-F238E27FC236}">
+                <a16:creationId xmlns:a16="http://schemas.microsoft.com/office/drawing/2014/main" id="{7B1D446B-64C1-3D67-5FEB-59D6A126C330}"/>
+              </a:ext>
+            </a:extLst>
+          </p:cNvPr>
+          <p:cNvSpPr>
+            <a:spLocks noGrp="1"/>
+          </p:cNvSpPr>
+          <p:nvPr>
+            <p:ph type="title"/>
+          </p:nvPr>
+        </p:nvSpPr>
+        <p:spPr/>
+        <p:txBody>
+          <a:bodyPr/>
+          <a:lstStyle/>
+          <a:p>
+            <a:r>
+              <a:rPr lang="lt-LT" dirty="0"/>
+              <a:t>Dabar pasikalbėkime su kompiuteriu</a:t>
+            </a:r>
+            <a:endParaRPr lang="en-US" dirty="0"/>
+          </a:p>
+        </p:txBody>
+      </p:sp>
+      <p:sp>
+        <p:nvSpPr>
+          <p:cNvPr id="3" name="Content Placeholder 2">
+            <a:extLst>
+              <a:ext uri="{FF2B5EF4-FFF2-40B4-BE49-F238E27FC236}">
+                <a16:creationId xmlns:a16="http://schemas.microsoft.com/office/drawing/2014/main" id="{ACAD9847-2963-8492-2753-5DAFDC930C63}"/>
+              </a:ext>
+            </a:extLst>
+          </p:cNvPr>
+          <p:cNvSpPr>
+            <a:spLocks noGrp="1"/>
+          </p:cNvSpPr>
+          <p:nvPr>
+            <p:ph idx="1"/>
+          </p:nvPr>
+        </p:nvSpPr>
+        <p:spPr/>
+        <p:txBody>
+          <a:bodyPr/>
+          <a:lstStyle/>
+          <a:p>
+            <a:r>
+              <a:rPr lang="lt-LT" dirty="0"/>
+              <a:t>Dabar tikslas yra duoti </a:t>
+            </a:r>
+            <a:r>
+              <a:rPr lang="lt-LT" dirty="0" err="1"/>
+              <a:t>pythonui</a:t>
+            </a:r>
+            <a:r>
+              <a:rPr lang="lt-LT" dirty="0"/>
+              <a:t> labai paprastas instrukcijas, ir kad </a:t>
+            </a:r>
+            <a:r>
+              <a:rPr lang="lt-LT" dirty="0" err="1"/>
+              <a:t>pythonas</a:t>
+            </a:r>
+            <a:r>
+              <a:rPr lang="lt-LT" dirty="0"/>
+              <a:t> kažką padarytų:</a:t>
+            </a:r>
+          </a:p>
+          <a:p>
+            <a:r>
+              <a:rPr lang="lt-LT" dirty="0"/>
+              <a:t>Atsidarykit </a:t>
+            </a:r>
+            <a:r>
+              <a:rPr lang="lt-LT" dirty="0" err="1"/>
+              <a:t>python</a:t>
+            </a:r>
+            <a:r>
+              <a:rPr lang="lt-LT" dirty="0"/>
+              <a:t>:</a:t>
+            </a:r>
+          </a:p>
+          <a:p>
+            <a:r>
+              <a:rPr lang="lt-LT" dirty="0"/>
+              <a:t>Parašykit </a:t>
+            </a:r>
+            <a:r>
+              <a:rPr lang="lt-LT" dirty="0" err="1"/>
+              <a:t>help</a:t>
+            </a:r>
+            <a:r>
+              <a:rPr lang="lt-LT" dirty="0"/>
+              <a:t> (</a:t>
+            </a:r>
+            <a:r>
+              <a:rPr lang="lt-LT" dirty="0" err="1"/>
+              <a:t>panaviguosim</a:t>
+            </a:r>
+            <a:r>
+              <a:rPr lang="lt-LT" dirty="0"/>
+              <a:t> kartu)</a:t>
+            </a:r>
+          </a:p>
+          <a:p>
+            <a:pPr marL="0" indent="0">
+              <a:buNone/>
+            </a:pPr>
+            <a:r>
+              <a:rPr lang="lt-LT" dirty="0"/>
+              <a:t>Paprasčiausios komandos, kurias patestuosim;</a:t>
+            </a:r>
+          </a:p>
+          <a:p>
+            <a:r>
+              <a:rPr lang="lt-LT" dirty="0" err="1"/>
+              <a:t>print</a:t>
+            </a:r>
+            <a:r>
+              <a:rPr lang="lt-LT" dirty="0"/>
+              <a:t>()</a:t>
+            </a:r>
+          </a:p>
+          <a:p>
+            <a:r>
+              <a:rPr lang="lt-LT" dirty="0"/>
+              <a:t>Paprasta matematika (</a:t>
+            </a:r>
+            <a:r>
+              <a:rPr lang="en-US" dirty="0"/>
+              <a:t>+ - / *)</a:t>
+            </a:r>
+            <a:endParaRPr lang="lt-LT" dirty="0"/>
+          </a:p>
+          <a:p>
+            <a:pPr marL="0" indent="0">
+              <a:buNone/>
+            </a:pPr>
+            <a:endParaRPr lang="lt-LT" dirty="0"/>
+          </a:p>
+          <a:p>
+            <a:endParaRPr lang="en-US" dirty="0"/>
+          </a:p>
+        </p:txBody>
+      </p:sp>
+    </p:spTree>
+    <p:extLst>
+      <p:ext uri="{BB962C8B-B14F-4D97-AF65-F5344CB8AC3E}">
+        <p14:creationId xmlns:p14="http://schemas.microsoft.com/office/powerpoint/2010/main" val="626466560"/>
+      </p:ext>
+    </p:extLst>
+  </p:cSld>
+  <p:clrMapOvr>
+    <a:masterClrMapping/>
+  </p:clrMapOvr>
+</p:sld>
+</file>
+
+<file path=ppt/slides/slide14.xml><?xml version="1.0" encoding="utf-8"?>
+<p:sld xmlns:a="http://schemas.openxmlformats.org/drawingml/2006/main" xmlns:r="http://schemas.openxmlformats.org/officeDocument/2006/relationships" xmlns:p="http://schemas.openxmlformats.org/presentationml/2006/main">
+  <p:cSld>
+    <p:spTree>
+      <p:nvGrpSpPr>
+        <p:cNvPr id="1" name=""/>
+        <p:cNvGrpSpPr/>
+        <p:nvPr/>
+      </p:nvGrpSpPr>
+      <p:grpSpPr>
+        <a:xfrm>
+          <a:off x="0" y="0"/>
+          <a:ext cx="0" cy="0"/>
+          <a:chOff x="0" y="0"/>
+          <a:chExt cx="0" cy="0"/>
+        </a:xfrm>
+      </p:grpSpPr>
+      <p:sp>
+        <p:nvSpPr>
+          <p:cNvPr id="2" name="Title 1">
+            <a:extLst>
+              <a:ext uri="{FF2B5EF4-FFF2-40B4-BE49-F238E27FC236}">
                 <a16:creationId xmlns:a16="http://schemas.microsoft.com/office/drawing/2014/main" id="{82C0273C-C062-F183-16B2-32BFFB453159}"/>
               </a:ext>
             </a:extLst>
@@ -3900,7 +4205,7 @@
 </p:sld>
 </file>
 
-<file path=ppt/slides/slide13.xml><?xml version="1.0" encoding="utf-8"?>
+<file path=ppt/slides/slide15.xml><?xml version="1.0" encoding="utf-8"?>
 <p:sld xmlns:a="http://schemas.openxmlformats.org/drawingml/2006/main" xmlns:r="http://schemas.openxmlformats.org/officeDocument/2006/relationships" xmlns:p="http://schemas.openxmlformats.org/presentationml/2006/main">
   <p:cSld>
     <p:spTree>
@@ -4471,292 +4776,6 @@
 </p:sld>
 </file>
 
-<file path=ppt/slides/slide14.xml><?xml version="1.0" encoding="utf-8"?>
-<p:sld xmlns:a="http://schemas.openxmlformats.org/drawingml/2006/main" xmlns:r="http://schemas.openxmlformats.org/officeDocument/2006/relationships" xmlns:p="http://schemas.openxmlformats.org/presentationml/2006/main">
-  <p:cSld>
-    <p:spTree>
-      <p:nvGrpSpPr>
-        <p:cNvPr id="1" name=""/>
-        <p:cNvGrpSpPr/>
-        <p:nvPr/>
-      </p:nvGrpSpPr>
-      <p:grpSpPr>
-        <a:xfrm>
-          <a:off x="0" y="0"/>
-          <a:ext cx="0" cy="0"/>
-          <a:chOff x="0" y="0"/>
-          <a:chExt cx="0" cy="0"/>
-        </a:xfrm>
-      </p:grpSpPr>
-      <p:sp>
-        <p:nvSpPr>
-          <p:cNvPr id="2" name="Title 1">
-            <a:extLst>
-              <a:ext uri="{FF2B5EF4-FFF2-40B4-BE49-F238E27FC236}">
-                <a16:creationId xmlns:a16="http://schemas.microsoft.com/office/drawing/2014/main" id="{9E4FE450-07F0-F3CF-CCD1-FACB7657FE23}"/>
-              </a:ext>
-            </a:extLst>
-          </p:cNvPr>
-          <p:cNvSpPr>
-            <a:spLocks noGrp="1"/>
-          </p:cNvSpPr>
-          <p:nvPr>
-            <p:ph type="title"/>
-          </p:nvPr>
-        </p:nvSpPr>
-        <p:spPr/>
-        <p:txBody>
-          <a:bodyPr>
-            <a:normAutofit fontScale="90000"/>
-          </a:bodyPr>
-          <a:lstStyle/>
-          <a:p>
-            <a:r>
-              <a:rPr lang="lt-LT" dirty="0"/>
-              <a:t>O jei kompiuteris negali interpretuoti informacijos, tada kaip jis supranta informacija kuria jam duodi?</a:t>
-            </a:r>
-            <a:endParaRPr lang="en-US" dirty="0"/>
-          </a:p>
-        </p:txBody>
-      </p:sp>
-      <p:sp>
-        <p:nvSpPr>
-          <p:cNvPr id="3" name="Content Placeholder 2">
-            <a:extLst>
-              <a:ext uri="{FF2B5EF4-FFF2-40B4-BE49-F238E27FC236}">
-                <a16:creationId xmlns:a16="http://schemas.microsoft.com/office/drawing/2014/main" id="{49164455-AA89-8371-0BCD-4565B76D004A}"/>
-              </a:ext>
-            </a:extLst>
-          </p:cNvPr>
-          <p:cNvSpPr>
-            <a:spLocks noGrp="1"/>
-          </p:cNvSpPr>
-          <p:nvPr>
-            <p:ph idx="1"/>
-          </p:nvPr>
-        </p:nvSpPr>
-        <p:spPr>
-          <a:xfrm>
-            <a:off x="838200" y="1796128"/>
-            <a:ext cx="10515600" cy="4351338"/>
-          </a:xfrm>
-        </p:spPr>
-        <p:txBody>
-          <a:bodyPr/>
-          <a:lstStyle/>
-          <a:p>
-            <a:r>
-              <a:rPr lang="lt-LT" dirty="0"/>
-              <a:t>Visą informacija gali padalinti į kintamuosius ir konstantas.</a:t>
-            </a:r>
-          </a:p>
-          <a:p>
-            <a:r>
-              <a:rPr lang="lt-LT" dirty="0"/>
-              <a:t>Kintamieji ir konstantos turi tipus, </a:t>
-            </a:r>
-            <a:r>
-              <a:rPr lang="lt-LT" dirty="0" err="1"/>
-              <a:t>pvz</a:t>
-            </a:r>
-            <a:r>
-              <a:rPr lang="lt-LT" dirty="0"/>
-              <a:t> ar tai yra skaičius, kokio dydžio tai yra skaičius, ar tai yra žodžiai, raidė. </a:t>
-            </a:r>
-          </a:p>
-          <a:p>
-            <a:r>
-              <a:rPr lang="lt-LT" dirty="0"/>
-              <a:t>Informacijos tipų yra </a:t>
-            </a:r>
-            <a:r>
-              <a:rPr lang="en-US" dirty="0"/>
-              <a:t>4, </a:t>
-            </a:r>
-            <a:r>
-              <a:rPr lang="en-US" dirty="0" err="1"/>
-              <a:t>visi</a:t>
-            </a:r>
-            <a:r>
-              <a:rPr lang="en-US" dirty="0"/>
-              <a:t> </a:t>
-            </a:r>
-            <a:r>
-              <a:rPr lang="en-US" dirty="0" err="1"/>
-              <a:t>kiti</a:t>
-            </a:r>
-            <a:r>
-              <a:rPr lang="en-US" dirty="0"/>
-              <a:t> </a:t>
-            </a:r>
-            <a:r>
-              <a:rPr lang="en-US" dirty="0" err="1"/>
-              <a:t>yra</a:t>
-            </a:r>
-            <a:r>
-              <a:rPr lang="en-US" dirty="0"/>
-              <a:t> j</a:t>
-            </a:r>
-            <a:r>
-              <a:rPr lang="lt-LT" dirty="0"/>
-              <a:t>ų variacijos ir kombinacijos.</a:t>
-            </a:r>
-          </a:p>
-          <a:p>
-            <a:r>
-              <a:rPr lang="lt-LT" dirty="0"/>
-              <a:t>Gali </a:t>
-            </a:r>
-            <a:r>
-              <a:rPr lang="lt-LT" dirty="0" err="1"/>
-              <a:t>paiimti</a:t>
-            </a:r>
-            <a:r>
-              <a:rPr lang="lt-LT" dirty="0"/>
-              <a:t> jau egzistuojančius kintamuosius ir konstantas, su jais daryti matematines operacijas, kurti naujus kintamuosius ir keisti jau egzistuojančius informacijos tipus.</a:t>
-            </a:r>
-          </a:p>
-          <a:p>
-            <a:endParaRPr lang="lt-LT" dirty="0"/>
-          </a:p>
-        </p:txBody>
-      </p:sp>
-    </p:spTree>
-    <p:extLst>
-      <p:ext uri="{BB962C8B-B14F-4D97-AF65-F5344CB8AC3E}">
-        <p14:creationId xmlns:p14="http://schemas.microsoft.com/office/powerpoint/2010/main" val="550719200"/>
-      </p:ext>
-    </p:extLst>
-  </p:cSld>
-  <p:clrMapOvr>
-    <a:masterClrMapping/>
-  </p:clrMapOvr>
-</p:sld>
-</file>
-
-<file path=ppt/slides/slide15.xml><?xml version="1.0" encoding="utf-8"?>
-<p:sld xmlns:a="http://schemas.openxmlformats.org/drawingml/2006/main" xmlns:r="http://schemas.openxmlformats.org/officeDocument/2006/relationships" xmlns:p="http://schemas.openxmlformats.org/presentationml/2006/main">
-  <p:cSld>
-    <p:spTree>
-      <p:nvGrpSpPr>
-        <p:cNvPr id="1" name=""/>
-        <p:cNvGrpSpPr/>
-        <p:nvPr/>
-      </p:nvGrpSpPr>
-      <p:grpSpPr>
-        <a:xfrm>
-          <a:off x="0" y="0"/>
-          <a:ext cx="0" cy="0"/>
-          <a:chOff x="0" y="0"/>
-          <a:chExt cx="0" cy="0"/>
-        </a:xfrm>
-      </p:grpSpPr>
-      <p:sp>
-        <p:nvSpPr>
-          <p:cNvPr id="2" name="Title 1">
-            <a:extLst>
-              <a:ext uri="{FF2B5EF4-FFF2-40B4-BE49-F238E27FC236}">
-                <a16:creationId xmlns:a16="http://schemas.microsoft.com/office/drawing/2014/main" id="{139ABA62-ABBD-4E89-C531-0557A8064EF7}"/>
-              </a:ext>
-            </a:extLst>
-          </p:cNvPr>
-          <p:cNvSpPr>
-            <a:spLocks noGrp="1"/>
-          </p:cNvSpPr>
-          <p:nvPr>
-            <p:ph type="title"/>
-          </p:nvPr>
-        </p:nvSpPr>
-        <p:spPr/>
-        <p:txBody>
-          <a:bodyPr/>
-          <a:lstStyle/>
-          <a:p>
-            <a:r>
-              <a:rPr lang="lt-LT" dirty="0"/>
-              <a:t>Kintamieji:</a:t>
-            </a:r>
-            <a:endParaRPr lang="en-US" dirty="0"/>
-          </a:p>
-        </p:txBody>
-      </p:sp>
-      <p:sp>
-        <p:nvSpPr>
-          <p:cNvPr id="3" name="Content Placeholder 2">
-            <a:extLst>
-              <a:ext uri="{FF2B5EF4-FFF2-40B4-BE49-F238E27FC236}">
-                <a16:creationId xmlns:a16="http://schemas.microsoft.com/office/drawing/2014/main" id="{97F48221-F633-02DE-74E1-FCED7081F1E8}"/>
-              </a:ext>
-            </a:extLst>
-          </p:cNvPr>
-          <p:cNvSpPr>
-            <a:spLocks noGrp="1"/>
-          </p:cNvSpPr>
-          <p:nvPr>
-            <p:ph idx="1"/>
-          </p:nvPr>
-        </p:nvSpPr>
-        <p:spPr/>
-        <p:txBody>
-          <a:bodyPr/>
-          <a:lstStyle/>
-          <a:p>
-            <a:r>
-              <a:rPr lang="lt-LT" dirty="0" err="1"/>
-              <a:t>Integer</a:t>
-            </a:r>
-            <a:endParaRPr lang="lt-LT" dirty="0"/>
-          </a:p>
-          <a:p>
-            <a:r>
-              <a:rPr lang="lt-LT" dirty="0" err="1"/>
-              <a:t>Char</a:t>
-            </a:r>
-            <a:endParaRPr lang="lt-LT" dirty="0"/>
-          </a:p>
-          <a:p>
-            <a:r>
-              <a:rPr lang="lt-LT" dirty="0" err="1"/>
-              <a:t>Floating</a:t>
-            </a:r>
-            <a:r>
-              <a:rPr lang="lt-LT" dirty="0"/>
-              <a:t> </a:t>
-            </a:r>
-            <a:r>
-              <a:rPr lang="lt-LT" dirty="0" err="1"/>
-              <a:t>point</a:t>
-            </a:r>
-            <a:endParaRPr lang="lt-LT" dirty="0"/>
-          </a:p>
-          <a:p>
-            <a:r>
-              <a:rPr lang="lt-LT" dirty="0" err="1"/>
-              <a:t>Boolean</a:t>
-            </a:r>
-            <a:endParaRPr lang="lt-LT" dirty="0"/>
-          </a:p>
-          <a:p>
-            <a:endParaRPr lang="lt-LT" dirty="0"/>
-          </a:p>
-          <a:p>
-            <a:endParaRPr lang="en-US" dirty="0"/>
-          </a:p>
-        </p:txBody>
-      </p:sp>
-    </p:spTree>
-    <p:extLst>
-      <p:ext uri="{BB962C8B-B14F-4D97-AF65-F5344CB8AC3E}">
-        <p14:creationId xmlns:p14="http://schemas.microsoft.com/office/powerpoint/2010/main" val="2409770614"/>
-      </p:ext>
-    </p:extLst>
-  </p:cSld>
-  <p:clrMapOvr>
-    <a:masterClrMapping/>
-  </p:clrMapOvr>
-</p:sld>
-</file>
-
 <file path=ppt/slides/slide16.xml><?xml version="1.0" encoding="utf-8"?>
 <p:sld xmlns:a="http://schemas.openxmlformats.org/drawingml/2006/main" xmlns:r="http://schemas.openxmlformats.org/officeDocument/2006/relationships" xmlns:p="http://schemas.openxmlformats.org/presentationml/2006/main">
   <p:cSld>
@@ -4779,7 +4798,7 @@
           <p:cNvPr id="2" name="Title 1">
             <a:extLst>
               <a:ext uri="{FF2B5EF4-FFF2-40B4-BE49-F238E27FC236}">
-                <a16:creationId xmlns:a16="http://schemas.microsoft.com/office/drawing/2014/main" id="{233CE057-9A08-0905-F598-6A9820CD90DA}"/>
+                <a16:creationId xmlns:a16="http://schemas.microsoft.com/office/drawing/2014/main" id="{9E4FE450-07F0-F3CF-CCD1-FACB7657FE23}"/>
               </a:ext>
             </a:extLst>
           </p:cNvPr>
@@ -4792,95 +4811,125 @@
         </p:nvSpPr>
         <p:spPr/>
         <p:txBody>
-          <a:bodyPr/>
-          <a:lstStyle/>
-          <a:p>
+          <a:bodyPr>
+            <a:normAutofit fontScale="90000"/>
+          </a:bodyPr>
+          <a:lstStyle/>
+          <a:p>
+            <a:r>
+              <a:rPr lang="lt-LT" dirty="0"/>
+              <a:t>O jei kompiuteris negali interpretuoti informacijos, tada kaip jis supranta informacija kuria jam duodi?</a:t>
+            </a:r>
+            <a:endParaRPr lang="en-US" dirty="0"/>
+          </a:p>
+        </p:txBody>
+      </p:sp>
+      <p:sp>
+        <p:nvSpPr>
+          <p:cNvPr id="3" name="Content Placeholder 2">
+            <a:extLst>
+              <a:ext uri="{FF2B5EF4-FFF2-40B4-BE49-F238E27FC236}">
+                <a16:creationId xmlns:a16="http://schemas.microsoft.com/office/drawing/2014/main" id="{49164455-AA89-8371-0BCD-4565B76D004A}"/>
+              </a:ext>
+            </a:extLst>
+          </p:cNvPr>
+          <p:cNvSpPr>
+            <a:spLocks noGrp="1"/>
+          </p:cNvSpPr>
+          <p:nvPr>
+            <p:ph idx="1"/>
+          </p:nvPr>
+        </p:nvSpPr>
+        <p:spPr>
+          <a:xfrm>
+            <a:off x="838200" y="1796128"/>
+            <a:ext cx="10515600" cy="4351338"/>
+          </a:xfrm>
+        </p:spPr>
+        <p:txBody>
+          <a:bodyPr/>
+          <a:lstStyle/>
+          <a:p>
+            <a:r>
+              <a:rPr lang="lt-LT" dirty="0"/>
+              <a:t>Visą informacija gali padalinti į kintamuosius ir konstantas.</a:t>
+            </a:r>
+          </a:p>
+          <a:p>
+            <a:r>
+              <a:rPr lang="lt-LT" dirty="0"/>
+              <a:t>Kintamieji ir konstantos turi tipus, </a:t>
+            </a:r>
             <a:r>
               <a:rPr lang="lt-LT" dirty="0" err="1"/>
-              <a:t>Composite</a:t>
-            </a:r>
-            <a:r>
-              <a:rPr lang="lt-LT" dirty="0"/>
-              <a:t> Kintamieji</a:t>
-            </a:r>
-            <a:endParaRPr lang="en-US" dirty="0"/>
-          </a:p>
-        </p:txBody>
-      </p:sp>
-      <p:sp>
-        <p:nvSpPr>
-          <p:cNvPr id="3" name="Content Placeholder 2">
-            <a:extLst>
-              <a:ext uri="{FF2B5EF4-FFF2-40B4-BE49-F238E27FC236}">
-                <a16:creationId xmlns:a16="http://schemas.microsoft.com/office/drawing/2014/main" id="{8C4BE723-6067-F5CE-693B-7DF3C067E367}"/>
-              </a:ext>
-            </a:extLst>
-          </p:cNvPr>
-          <p:cNvSpPr>
-            <a:spLocks noGrp="1"/>
-          </p:cNvSpPr>
-          <p:nvPr>
-            <p:ph idx="1"/>
-          </p:nvPr>
-        </p:nvSpPr>
-        <p:spPr/>
-        <p:txBody>
-          <a:bodyPr/>
-          <a:lstStyle/>
-          <a:p>
+              <a:t>pvz</a:t>
+            </a:r>
+            <a:r>
+              <a:rPr lang="lt-LT" dirty="0"/>
+              <a:t> ar tai yra skaičius, kokio dydžio tai yra skaičius, ar tai yra žodžiai, raidė. </a:t>
+            </a:r>
+          </a:p>
+          <a:p>
+            <a:r>
+              <a:rPr lang="lt-LT" dirty="0"/>
+              <a:t>Informacijos tipų yra </a:t>
+            </a:r>
+            <a:r>
+              <a:rPr lang="en-US" dirty="0"/>
+              <a:t>4, </a:t>
+            </a:r>
+            <a:r>
+              <a:rPr lang="en-US" dirty="0" err="1"/>
+              <a:t>visi</a:t>
+            </a:r>
+            <a:r>
+              <a:rPr lang="en-US" dirty="0"/>
+              <a:t> </a:t>
+            </a:r>
+            <a:r>
+              <a:rPr lang="en-US" dirty="0" err="1"/>
+              <a:t>kiti</a:t>
+            </a:r>
+            <a:r>
+              <a:rPr lang="en-US" dirty="0"/>
+              <a:t> </a:t>
+            </a:r>
+            <a:r>
+              <a:rPr lang="en-US" dirty="0" err="1"/>
+              <a:t>yra</a:t>
+            </a:r>
+            <a:r>
+              <a:rPr lang="en-US" dirty="0"/>
+              <a:t> j</a:t>
+            </a:r>
+            <a:r>
+              <a:rPr lang="lt-LT" dirty="0"/>
+              <a:t>ų variacijos ir kombinacijos.</a:t>
+            </a:r>
+          </a:p>
+          <a:p>
+            <a:r>
+              <a:rPr lang="lt-LT" dirty="0"/>
+              <a:t>Gali </a:t>
+            </a:r>
             <a:r>
               <a:rPr lang="lt-LT" dirty="0" err="1"/>
-              <a:t>String</a:t>
-            </a:r>
+              <a:t>paiimti</a:t>
+            </a:r>
+            <a:r>
+              <a:rPr lang="lt-LT" dirty="0"/>
+              <a:t> jau egzistuojančius kintamuosius ir konstantas, su jais daryti matematines operacijas, kurti naujus kintamuosius ir keisti jau egzistuojančius informacijos tipus.</a:t>
+            </a:r>
+          </a:p>
+          <a:p>
             <a:endParaRPr lang="lt-LT" dirty="0"/>
-          </a:p>
-          <a:p>
-            <a:r>
-              <a:rPr lang="lt-LT" dirty="0" err="1"/>
-              <a:t>Array</a:t>
-            </a:r>
-            <a:endParaRPr lang="lt-LT" dirty="0"/>
-          </a:p>
-          <a:p>
-            <a:r>
-              <a:rPr lang="lt-LT" dirty="0" err="1"/>
-              <a:t>List</a:t>
-            </a:r>
-            <a:endParaRPr lang="lt-LT" dirty="0"/>
-          </a:p>
-          <a:p>
-            <a:r>
-              <a:rPr lang="lt-LT" dirty="0" err="1"/>
-              <a:t>Object</a:t>
-            </a:r>
-            <a:endParaRPr lang="lt-LT" dirty="0"/>
-          </a:p>
-          <a:p>
-            <a:r>
-              <a:rPr lang="lt-LT" dirty="0" err="1"/>
-              <a:t>Dictionary</a:t>
-            </a:r>
-            <a:endParaRPr lang="lt-LT" dirty="0"/>
-          </a:p>
-          <a:p>
-            <a:r>
-              <a:rPr lang="lt-LT" dirty="0" err="1"/>
-              <a:t>Matrix</a:t>
-            </a:r>
-            <a:endParaRPr lang="lt-LT" dirty="0"/>
-          </a:p>
-          <a:p>
-            <a:r>
-              <a:rPr lang="lt-LT" dirty="0"/>
-              <a:t>...</a:t>
-            </a:r>
           </a:p>
         </p:txBody>
       </p:sp>
     </p:spTree>
     <p:extLst>
       <p:ext uri="{BB962C8B-B14F-4D97-AF65-F5344CB8AC3E}">
-        <p14:creationId xmlns:p14="http://schemas.microsoft.com/office/powerpoint/2010/main" val="4161255921"/>
+        <p14:creationId xmlns:p14="http://schemas.microsoft.com/office/powerpoint/2010/main" val="550719200"/>
       </p:ext>
     </p:extLst>
   </p:cSld>
@@ -4912,7 +4961,7 @@
           <p:cNvPr id="2" name="Title 1">
             <a:extLst>
               <a:ext uri="{FF2B5EF4-FFF2-40B4-BE49-F238E27FC236}">
-                <a16:creationId xmlns:a16="http://schemas.microsoft.com/office/drawing/2014/main" id="{663769DB-D60A-AF49-1C68-513F7039496F}"/>
+                <a16:creationId xmlns:a16="http://schemas.microsoft.com/office/drawing/2014/main" id="{139ABA62-ABBD-4E89-C531-0557A8064EF7}"/>
               </a:ext>
             </a:extLst>
           </p:cNvPr>
@@ -4929,13 +4978,8 @@
           <a:lstStyle/>
           <a:p>
             <a:r>
-              <a:rPr lang="lt-LT" dirty="0">
-                <a:solidFill>
-                  <a:srgbClr val="000000"/>
-                </a:solidFill>
-                <a:latin typeface="Calibri"/>
-              </a:rPr>
-              <a:t>Kintamieji nėra magija</a:t>
+              <a:rPr lang="lt-LT" dirty="0"/>
+              <a:t>Kintamieji:</a:t>
             </a:r>
             <a:endParaRPr lang="en-US" dirty="0"/>
           </a:p>
@@ -4946,7 +4990,7 @@
           <p:cNvPr id="3" name="Content Placeholder 2">
             <a:extLst>
               <a:ext uri="{FF2B5EF4-FFF2-40B4-BE49-F238E27FC236}">
-                <a16:creationId xmlns:a16="http://schemas.microsoft.com/office/drawing/2014/main" id="{8534849B-B726-4D72-136F-F02F43D65B10}"/>
+                <a16:creationId xmlns:a16="http://schemas.microsoft.com/office/drawing/2014/main" id="{97F48221-F633-02DE-74E1-FCED7081F1E8}"/>
               </a:ext>
             </a:extLst>
           </p:cNvPr>
@@ -4962,75 +5006,53 @@
           <a:bodyPr/>
           <a:lstStyle/>
           <a:p>
-            <a:pPr>
-              <a:spcAft>
-                <a:spcPts val="400"/>
-              </a:spcAft>
-            </a:pPr>
-            <a:r>
-              <a:rPr lang="lt-LT" dirty="0">
-                <a:solidFill>
-                  <a:srgbClr val="000000"/>
-                </a:solidFill>
-                <a:latin typeface="Calibri"/>
-              </a:rPr>
-              <a:t> Kintamasis yra vardas, kuriuo nurodom į kažkokią reikšmę.</a:t>
-            </a:r>
-          </a:p>
-          <a:p>
-            <a:pPr>
-              <a:spcAft>
-                <a:spcPts val="400"/>
-              </a:spcAft>
-            </a:pPr>
-            <a:r>
-              <a:rPr lang="lt-LT" dirty="0">
-                <a:solidFill>
-                  <a:srgbClr val="000000"/>
-                </a:solidFill>
-                <a:latin typeface="Calibri"/>
-              </a:rPr>
-              <a:t> Svarbiausias klausimas: ką programa žino šiuo momentu?</a:t>
-            </a:r>
-          </a:p>
-          <a:p>
-            <a:pPr>
-              <a:spcAft>
-                <a:spcPts val="400"/>
-              </a:spcAft>
-            </a:pPr>
-            <a:r>
-              <a:rPr lang="lt-LT" dirty="0">
-                <a:solidFill>
-                  <a:srgbClr val="000000"/>
-                </a:solidFill>
-                <a:latin typeface="Calibri"/>
-              </a:rPr>
-              <a:t> Jeigu reikšmė pasikeičia, pasikeičia ir programos būsena.</a:t>
-            </a:r>
-          </a:p>
-          <a:p>
-            <a:pPr>
-              <a:spcAft>
-                <a:spcPts val="400"/>
-              </a:spcAft>
-            </a:pPr>
-            <a:r>
-              <a:rPr lang="lt-LT" dirty="0">
-                <a:solidFill>
-                  <a:srgbClr val="000000"/>
-                </a:solidFill>
-                <a:latin typeface="Calibri"/>
-              </a:rPr>
-              <a:t> Šitas mąstymas vėliau gelbės su žaidimais, automatizacija, klaidom ir viskuo kitu.</a:t>
-            </a:r>
+            <a:r>
+              <a:rPr lang="lt-LT" dirty="0" err="1"/>
+              <a:t>Integer</a:t>
+            </a:r>
+            <a:endParaRPr lang="lt-LT" dirty="0"/>
+          </a:p>
+          <a:p>
+            <a:r>
+              <a:rPr lang="lt-LT" dirty="0" err="1"/>
+              <a:t>Char</a:t>
+            </a:r>
+            <a:endParaRPr lang="lt-LT" dirty="0"/>
+          </a:p>
+          <a:p>
+            <a:r>
+              <a:rPr lang="lt-LT" dirty="0" err="1"/>
+              <a:t>Floating</a:t>
+            </a:r>
+            <a:r>
+              <a:rPr lang="lt-LT" dirty="0"/>
+              <a:t> </a:t>
+            </a:r>
+            <a:r>
+              <a:rPr lang="lt-LT" dirty="0" err="1"/>
+              <a:t>point</a:t>
+            </a:r>
+            <a:endParaRPr lang="lt-LT" dirty="0"/>
+          </a:p>
+          <a:p>
+            <a:r>
+              <a:rPr lang="lt-LT" dirty="0" err="1"/>
+              <a:t>Boolean</a:t>
+            </a:r>
+            <a:endParaRPr lang="lt-LT" dirty="0"/>
+          </a:p>
+          <a:p>
+            <a:endParaRPr lang="lt-LT" dirty="0"/>
+          </a:p>
+          <a:p>
+            <a:endParaRPr lang="en-US" dirty="0"/>
           </a:p>
         </p:txBody>
       </p:sp>
     </p:spTree>
     <p:extLst>
       <p:ext uri="{BB962C8B-B14F-4D97-AF65-F5344CB8AC3E}">
-        <p14:creationId xmlns:p14="http://schemas.microsoft.com/office/powerpoint/2010/main" val="2841752679"/>
+        <p14:creationId xmlns:p14="http://schemas.microsoft.com/office/powerpoint/2010/main" val="2409770614"/>
       </p:ext>
     </p:extLst>
   </p:cSld>
@@ -5062,7 +5084,7 @@
           <p:cNvPr id="2" name="Title 1">
             <a:extLst>
               <a:ext uri="{FF2B5EF4-FFF2-40B4-BE49-F238E27FC236}">
-                <a16:creationId xmlns:a16="http://schemas.microsoft.com/office/drawing/2014/main" id="{80EB107D-2583-3BCD-263E-DE243AE1BA98}"/>
+                <a16:creationId xmlns:a16="http://schemas.microsoft.com/office/drawing/2014/main" id="{233CE057-9A08-0905-F598-6A9820CD90DA}"/>
               </a:ext>
             </a:extLst>
           </p:cNvPr>
@@ -5079,49 +5101,12 @@
           <a:lstStyle/>
           <a:p>
             <a:r>
-              <a:rPr lang="en-US" dirty="0" err="1">
-                <a:solidFill>
-                  <a:srgbClr val="000000"/>
-                </a:solidFill>
-                <a:latin typeface="Calibri"/>
-              </a:rPr>
-              <a:t>Mažas</a:t>
-            </a:r>
-            <a:r>
-              <a:rPr lang="en-US" dirty="0">
-                <a:solidFill>
-                  <a:srgbClr val="000000"/>
-                </a:solidFill>
-                <a:latin typeface="Calibri"/>
-              </a:rPr>
-              <a:t> </a:t>
-            </a:r>
-            <a:r>
-              <a:rPr lang="en-US" dirty="0" err="1">
-                <a:solidFill>
-                  <a:srgbClr val="000000"/>
-                </a:solidFill>
-                <a:latin typeface="Calibri"/>
-              </a:rPr>
-              <a:t>mentalinis</a:t>
-            </a:r>
-            <a:r>
-              <a:rPr lang="en-US" dirty="0">
-                <a:solidFill>
-                  <a:srgbClr val="000000"/>
-                </a:solidFill>
-                <a:latin typeface="Calibri"/>
-              </a:rPr>
-              <a:t> </a:t>
-            </a:r>
-            <a:r>
-              <a:rPr lang="en-US" dirty="0" err="1">
-                <a:solidFill>
-                  <a:srgbClr val="000000"/>
-                </a:solidFill>
-                <a:latin typeface="Calibri"/>
-              </a:rPr>
-              <a:t>pratimas</a:t>
+              <a:rPr lang="lt-LT" dirty="0" err="1"/>
+              <a:t>Composite</a:t>
+            </a:r>
+            <a:r>
+              <a:rPr lang="lt-LT" dirty="0"/>
+              <a:t> Kintamieji</a:t>
             </a:r>
             <a:endParaRPr lang="en-US" dirty="0"/>
           </a:p>
@@ -5132,7 +5117,7 @@
           <p:cNvPr id="3" name="Content Placeholder 2">
             <a:extLst>
               <a:ext uri="{FF2B5EF4-FFF2-40B4-BE49-F238E27FC236}">
-                <a16:creationId xmlns:a16="http://schemas.microsoft.com/office/drawing/2014/main" id="{90C2F002-6FC8-1E3E-C690-495DE807D408}"/>
+                <a16:creationId xmlns:a16="http://schemas.microsoft.com/office/drawing/2014/main" id="{8C4BE723-6067-F5CE-693B-7DF3C067E367}"/>
               </a:ext>
             </a:extLst>
           </p:cNvPr>
@@ -5148,139 +5133,51 @@
           <a:bodyPr/>
           <a:lstStyle/>
           <a:p>
-            <a:pPr>
-              <a:spcAft>
-                <a:spcPts val="400"/>
-              </a:spcAft>
-            </a:pPr>
-            <a:r>
-              <a:rPr lang="lt-LT" dirty="0">
-                <a:solidFill>
-                  <a:srgbClr val="000000"/>
-                </a:solidFill>
-                <a:latin typeface="Calibri"/>
-              </a:rPr>
-              <a:t> Duodu kelias instrukcijas.</a:t>
-            </a:r>
-          </a:p>
-          <a:p>
-            <a:pPr>
-              <a:spcAft>
-                <a:spcPts val="400"/>
-              </a:spcAft>
-            </a:pPr>
-            <a:r>
-              <a:rPr lang="lt-LT" dirty="0">
-                <a:solidFill>
-                  <a:srgbClr val="000000"/>
-                </a:solidFill>
-                <a:latin typeface="Calibri"/>
-              </a:rPr>
-              <a:t> Jūs galvoje sekat, kokios reikšmės yra kintamuosiuose. (sudėtingesnės programos atveju gali prireikti pasibraižyti medį)</a:t>
-            </a:r>
-          </a:p>
-          <a:p>
-            <a:pPr>
-              <a:spcAft>
-                <a:spcPts val="400"/>
-              </a:spcAft>
-            </a:pPr>
-            <a:r>
-              <a:rPr lang="lt-LT" dirty="0">
-                <a:solidFill>
-                  <a:srgbClr val="000000"/>
-                </a:solidFill>
-                <a:latin typeface="Calibri"/>
-              </a:rPr>
-              <a:t> Tik tada paleidžiam </a:t>
-            </a:r>
-            <a:r>
-              <a:rPr lang="lt-LT" dirty="0" err="1">
-                <a:solidFill>
-                  <a:srgbClr val="000000"/>
-                </a:solidFill>
-                <a:latin typeface="Calibri"/>
-              </a:rPr>
-              <a:t>Python</a:t>
-            </a:r>
-            <a:r>
-              <a:rPr lang="lt-LT" dirty="0">
-                <a:solidFill>
-                  <a:srgbClr val="000000"/>
-                </a:solidFill>
-                <a:latin typeface="Calibri"/>
-              </a:rPr>
-              <a:t> ir tikrinam ar mūsų galva įvykdė programą taip pat.</a:t>
-            </a:r>
-          </a:p>
-          <a:p>
-            <a:pPr>
-              <a:spcAft>
-                <a:spcPts val="400"/>
-              </a:spcAft>
-            </a:pPr>
-            <a:r>
-              <a:rPr lang="lt-LT" dirty="0">
-                <a:solidFill>
-                  <a:srgbClr val="000000"/>
-                </a:solidFill>
-                <a:latin typeface="Calibri"/>
-              </a:rPr>
-              <a:t> </a:t>
-            </a:r>
-            <a:r>
-              <a:rPr lang="lt-LT" dirty="0" err="1">
-                <a:solidFill>
-                  <a:srgbClr val="000000"/>
-                </a:solidFill>
-                <a:latin typeface="Calibri"/>
-              </a:rPr>
-              <a:t>Predict</a:t>
-            </a:r>
-            <a:r>
-              <a:rPr lang="lt-LT" dirty="0">
-                <a:solidFill>
-                  <a:srgbClr val="000000"/>
-                </a:solidFill>
-                <a:latin typeface="Calibri"/>
-              </a:rPr>
-              <a:t> → </a:t>
-            </a:r>
-            <a:r>
-              <a:rPr lang="lt-LT" dirty="0" err="1">
-                <a:solidFill>
-                  <a:srgbClr val="000000"/>
-                </a:solidFill>
-                <a:latin typeface="Calibri"/>
-              </a:rPr>
-              <a:t>run</a:t>
-            </a:r>
-            <a:r>
-              <a:rPr lang="lt-LT" dirty="0">
-                <a:solidFill>
-                  <a:srgbClr val="000000"/>
-                </a:solidFill>
-                <a:latin typeface="Calibri"/>
-              </a:rPr>
-              <a:t> → </a:t>
-            </a:r>
-            <a:r>
-              <a:rPr lang="lt-LT" dirty="0" err="1">
-                <a:solidFill>
-                  <a:srgbClr val="000000"/>
-                </a:solidFill>
-                <a:latin typeface="Calibri"/>
-              </a:rPr>
-              <a:t>compare</a:t>
-            </a:r>
-            <a:r>
-              <a:rPr lang="lt-LT" dirty="0">
-                <a:solidFill>
-                  <a:srgbClr val="000000"/>
-                </a:solidFill>
-                <a:latin typeface="Calibri"/>
-              </a:rPr>
-              <a:t>. Šitą kartosim labai dažnai.</a:t>
+            <a:r>
+              <a:rPr lang="lt-LT" dirty="0" err="1"/>
+              <a:t>String</a:t>
+            </a:r>
+            <a:endParaRPr lang="lt-LT" dirty="0"/>
+          </a:p>
+          <a:p>
+            <a:r>
+              <a:rPr lang="lt-LT" dirty="0" err="1"/>
+              <a:t>Array</a:t>
+            </a:r>
+            <a:endParaRPr lang="lt-LT" dirty="0"/>
+          </a:p>
+          <a:p>
+            <a:r>
+              <a:rPr lang="lt-LT" dirty="0" err="1"/>
+              <a:t>List</a:t>
+            </a:r>
+            <a:endParaRPr lang="lt-LT" dirty="0"/>
+          </a:p>
+          <a:p>
+            <a:r>
+              <a:rPr lang="lt-LT" dirty="0" err="1"/>
+              <a:t>Object</a:t>
+            </a:r>
+            <a:endParaRPr lang="lt-LT" dirty="0"/>
+          </a:p>
+          <a:p>
+            <a:r>
+              <a:rPr lang="lt-LT" dirty="0" err="1"/>
+              <a:t>Dictionary</a:t>
+            </a:r>
+            <a:endParaRPr lang="lt-LT" dirty="0"/>
+          </a:p>
+          <a:p>
+            <a:r>
+              <a:rPr lang="lt-LT" dirty="0" err="1"/>
+              <a:t>Matrix</a:t>
+            </a:r>
+            <a:endParaRPr lang="lt-LT" dirty="0"/>
+          </a:p>
+          <a:p>
+            <a:r>
+              <a:rPr lang="lt-LT" dirty="0"/>
+              <a:t>...</a:t>
             </a:r>
           </a:p>
         </p:txBody>
@@ -5288,7 +5185,7 @@
     </p:spTree>
     <p:extLst>
       <p:ext uri="{BB962C8B-B14F-4D97-AF65-F5344CB8AC3E}">
-        <p14:creationId xmlns:p14="http://schemas.microsoft.com/office/powerpoint/2010/main" val="2560071035"/>
+        <p14:creationId xmlns:p14="http://schemas.microsoft.com/office/powerpoint/2010/main" val="4161255921"/>
       </p:ext>
     </p:extLst>
   </p:cSld>
@@ -5320,7 +5217,7 @@
           <p:cNvPr id="2" name="Title 1">
             <a:extLst>
               <a:ext uri="{FF2B5EF4-FFF2-40B4-BE49-F238E27FC236}">
-                <a16:creationId xmlns:a16="http://schemas.microsoft.com/office/drawing/2014/main" id="{141B987A-B059-A3B9-433D-55FE7C298362}"/>
+                <a16:creationId xmlns:a16="http://schemas.microsoft.com/office/drawing/2014/main" id="{663769DB-D60A-AF49-1C68-513F7039496F}"/>
               </a:ext>
             </a:extLst>
           </p:cNvPr>
@@ -5337,8 +5234,13 @@
           <a:lstStyle/>
           <a:p>
             <a:r>
-              <a:rPr lang="lt-LT" dirty="0"/>
-              <a:t>Pasikalbėkime vėl su kompiuteriu</a:t>
+              <a:rPr lang="lt-LT" dirty="0">
+                <a:solidFill>
+                  <a:srgbClr val="000000"/>
+                </a:solidFill>
+                <a:latin typeface="Calibri"/>
+              </a:rPr>
+              <a:t>Kintamieji nėra magija</a:t>
             </a:r>
             <a:endParaRPr lang="en-US" dirty="0"/>
           </a:p>
@@ -5349,7 +5251,7 @@
           <p:cNvPr id="3" name="Content Placeholder 2">
             <a:extLst>
               <a:ext uri="{FF2B5EF4-FFF2-40B4-BE49-F238E27FC236}">
-                <a16:creationId xmlns:a16="http://schemas.microsoft.com/office/drawing/2014/main" id="{A76A4468-D134-3D2D-F6DE-E8BF28E5A74C}"/>
+                <a16:creationId xmlns:a16="http://schemas.microsoft.com/office/drawing/2014/main" id="{8534849B-B726-4D72-136F-F02F43D65B10}"/>
               </a:ext>
             </a:extLst>
           </p:cNvPr>
@@ -5365,30 +5267,75 @@
           <a:bodyPr/>
           <a:lstStyle/>
           <a:p>
-            <a:r>
-              <a:rPr lang="lt-LT" dirty="0"/>
-              <a:t>Sukuriame kelis kintamuosius ir konstantas</a:t>
-            </a:r>
-          </a:p>
-          <a:p>
-            <a:r>
-              <a:rPr lang="lt-LT" dirty="0"/>
-              <a:t>Keičiame jų reikšmes</a:t>
-            </a:r>
-          </a:p>
-          <a:p>
-            <a:r>
-              <a:rPr lang="lt-LT" dirty="0"/>
-              <a:t>Skaičiuojame naujas reikšmes iš senų</a:t>
-            </a:r>
-            <a:endParaRPr lang="en-US" dirty="0"/>
+            <a:pPr>
+              <a:spcAft>
+                <a:spcPts val="400"/>
+              </a:spcAft>
+            </a:pPr>
+            <a:r>
+              <a:rPr lang="lt-LT" dirty="0">
+                <a:solidFill>
+                  <a:srgbClr val="000000"/>
+                </a:solidFill>
+                <a:latin typeface="Calibri"/>
+              </a:rPr>
+              <a:t> Kintamasis yra vardas, kuriuo nurodom į kažkokią reikšmę.</a:t>
+            </a:r>
+          </a:p>
+          <a:p>
+            <a:pPr>
+              <a:spcAft>
+                <a:spcPts val="400"/>
+              </a:spcAft>
+            </a:pPr>
+            <a:r>
+              <a:rPr lang="lt-LT" dirty="0">
+                <a:solidFill>
+                  <a:srgbClr val="000000"/>
+                </a:solidFill>
+                <a:latin typeface="Calibri"/>
+              </a:rPr>
+              <a:t> Svarbiausias klausimas: ką programa žino šiuo momentu?</a:t>
+            </a:r>
+          </a:p>
+          <a:p>
+            <a:pPr>
+              <a:spcAft>
+                <a:spcPts val="400"/>
+              </a:spcAft>
+            </a:pPr>
+            <a:r>
+              <a:rPr lang="lt-LT" dirty="0">
+                <a:solidFill>
+                  <a:srgbClr val="000000"/>
+                </a:solidFill>
+                <a:latin typeface="Calibri"/>
+              </a:rPr>
+              <a:t> Jeigu reikšmė pasikeičia, pasikeičia ir programos būsena.</a:t>
+            </a:r>
+          </a:p>
+          <a:p>
+            <a:pPr>
+              <a:spcAft>
+                <a:spcPts val="400"/>
+              </a:spcAft>
+            </a:pPr>
+            <a:r>
+              <a:rPr lang="lt-LT" dirty="0">
+                <a:solidFill>
+                  <a:srgbClr val="000000"/>
+                </a:solidFill>
+                <a:latin typeface="Calibri"/>
+              </a:rPr>
+              <a:t> Šitas mąstymas vėliau gelbės su žaidimais, automatizacija, klaidom ir viskuo kitu.</a:t>
+            </a:r>
           </a:p>
         </p:txBody>
       </p:sp>
     </p:spTree>
     <p:extLst>
       <p:ext uri="{BB962C8B-B14F-4D97-AF65-F5344CB8AC3E}">
-        <p14:creationId xmlns:p14="http://schemas.microsoft.com/office/powerpoint/2010/main" val="2295014639"/>
+        <p14:creationId xmlns:p14="http://schemas.microsoft.com/office/powerpoint/2010/main" val="2841752679"/>
       </p:ext>
     </p:extLst>
   </p:cSld>
@@ -5462,7 +5409,9 @@
         </p:nvSpPr>
         <p:spPr/>
         <p:txBody>
-          <a:bodyPr/>
+          <a:bodyPr>
+            <a:normAutofit lnSpcReduction="10000"/>
+          </a:bodyPr>
           <a:lstStyle/>
           <a:p>
             <a:r>
@@ -5506,7 +5455,7 @@
               <a:t>Mokėti užtektinai </a:t>
             </a:r>
             <a:r>
-              <a:rPr lang="lt-LT" dirty="0" err="1"/>
+              <a:rPr lang="en-US" dirty="0"/>
               <a:t>python</a:t>
             </a:r>
             <a:r>
@@ -5536,6 +5485,14 @@
             <a:r>
               <a:rPr lang="lt-LT" dirty="0"/>
               <a:t>. YAY</a:t>
+            </a:r>
+            <a:r>
+              <a:rPr lang="en-US" dirty="0"/>
+              <a:t> (tai lie</a:t>
+            </a:r>
+            <a:r>
+              <a:rPr lang="lt-LT" dirty="0"/>
+              <a:t>čia ne vien projektus, bet ir kitas programavimo kalbas)</a:t>
             </a:r>
           </a:p>
           <a:p>
@@ -5590,7 +5547,7 @@
           <p:cNvPr id="2" name="Title 1">
             <a:extLst>
               <a:ext uri="{FF2B5EF4-FFF2-40B4-BE49-F238E27FC236}">
-                <a16:creationId xmlns:a16="http://schemas.microsoft.com/office/drawing/2014/main" id="{120AE951-C13A-90CE-2173-92F19476A82D}"/>
+                <a16:creationId xmlns:a16="http://schemas.microsoft.com/office/drawing/2014/main" id="{80EB107D-2583-3BCD-263E-DE243AE1BA98}"/>
               </a:ext>
             </a:extLst>
           </p:cNvPr>
@@ -5613,7 +5570,7 @@
                 </a:solidFill>
                 <a:latin typeface="Calibri"/>
               </a:rPr>
-              <a:t>Operatoriai</a:t>
+              <a:t>Mažas</a:t>
             </a:r>
             <a:r>
               <a:rPr lang="en-US" dirty="0">
@@ -5631,7 +5588,7 @@
                 </a:solidFill>
                 <a:latin typeface="Calibri"/>
               </a:rPr>
-              <a:t>ir</a:t>
+              <a:t>mentalinis</a:t>
             </a:r>
             <a:r>
               <a:rPr lang="en-US" dirty="0">
@@ -5649,7 +5606,7 @@
                 </a:solidFill>
                 <a:latin typeface="Calibri"/>
               </a:rPr>
-              <a:t>operandai</a:t>
+              <a:t>pratimas</a:t>
             </a:r>
             <a:endParaRPr lang="en-US" dirty="0"/>
           </a:p>
@@ -5660,7 +5617,7 @@
           <p:cNvPr id="3" name="Content Placeholder 2">
             <a:extLst>
               <a:ext uri="{FF2B5EF4-FFF2-40B4-BE49-F238E27FC236}">
-                <a16:creationId xmlns:a16="http://schemas.microsoft.com/office/drawing/2014/main" id="{0F6CB657-9482-6EC7-6ECB-A2AC510657EA}"/>
+                <a16:creationId xmlns:a16="http://schemas.microsoft.com/office/drawing/2014/main" id="{90C2F002-6FC8-1E3E-C690-495DE807D408}"/>
               </a:ext>
             </a:extLst>
           </p:cNvPr>
@@ -5688,7 +5645,7 @@
                 </a:solidFill>
                 <a:latin typeface="Calibri"/>
               </a:rPr>
-              <a:t> Operatorius – simbolis / veiksmas, kuris kažką padaro su reikšmėmis.</a:t>
+              <a:t> Duodu kelias instrukcijas.</a:t>
             </a:r>
           </a:p>
           <a:p>
@@ -5704,7 +5661,7 @@
                 </a:solidFill>
                 <a:latin typeface="Calibri"/>
               </a:rPr>
-              <a:t> Operandai – reikšmės su kuriomis tas operatorius dirba.</a:t>
+              <a:t> Jūs galvoje sekat, kokios reikšmės yra kintamuosiuose. (sudėtingesnės programos atveju gali prireikti pasibraižyti medį)</a:t>
             </a:r>
           </a:p>
           <a:p>
@@ -5720,7 +5677,25 @@
                 </a:solidFill>
                 <a:latin typeface="Calibri"/>
               </a:rPr>
-              <a:t> +, -, *, / – šiandien užtenka šitų.</a:t>
+              <a:t> Tik tada paleidžiam </a:t>
+            </a:r>
+            <a:r>
+              <a:rPr lang="lt-LT" dirty="0" err="1">
+                <a:solidFill>
+                  <a:srgbClr val="000000"/>
+                </a:solidFill>
+                <a:latin typeface="Calibri"/>
+              </a:rPr>
+              <a:t>Python</a:t>
+            </a:r>
+            <a:r>
+              <a:rPr lang="lt-LT" dirty="0">
+                <a:solidFill>
+                  <a:srgbClr val="000000"/>
+                </a:solidFill>
+                <a:latin typeface="Calibri"/>
+              </a:rPr>
+              <a:t> ir tikrinam ar mūsų galva įvykdė programą taip pat.</a:t>
             </a:r>
           </a:p>
           <a:p>
@@ -5736,7 +5711,61 @@
                 </a:solidFill>
                 <a:latin typeface="Calibri"/>
               </a:rPr>
-              <a:t> Kol kas nebandykit įsiminti visų operatorių. Pirmiausia reikia pagauti pačią idėją.</a:t>
+              <a:t> </a:t>
+            </a:r>
+            <a:r>
+              <a:rPr lang="lt-LT" dirty="0" err="1">
+                <a:solidFill>
+                  <a:srgbClr val="000000"/>
+                </a:solidFill>
+                <a:latin typeface="Calibri"/>
+              </a:rPr>
+              <a:t>Predict</a:t>
+            </a:r>
+            <a:r>
+              <a:rPr lang="lt-LT" dirty="0">
+                <a:solidFill>
+                  <a:srgbClr val="000000"/>
+                </a:solidFill>
+                <a:latin typeface="Calibri"/>
+              </a:rPr>
+              <a:t> → </a:t>
+            </a:r>
+            <a:r>
+              <a:rPr lang="lt-LT" dirty="0" err="1">
+                <a:solidFill>
+                  <a:srgbClr val="000000"/>
+                </a:solidFill>
+                <a:latin typeface="Calibri"/>
+              </a:rPr>
+              <a:t>run</a:t>
+            </a:r>
+            <a:r>
+              <a:rPr lang="lt-LT" dirty="0">
+                <a:solidFill>
+                  <a:srgbClr val="000000"/>
+                </a:solidFill>
+                <a:latin typeface="Calibri"/>
+              </a:rPr>
+              <a:t> → </a:t>
+            </a:r>
+            <a:r>
+              <a:rPr lang="lt-LT" dirty="0" err="1">
+                <a:solidFill>
+                  <a:srgbClr val="000000"/>
+                </a:solidFill>
+                <a:latin typeface="Calibri"/>
+              </a:rPr>
+              <a:t>compare</a:t>
+            </a:r>
+            <a:r>
+              <a:rPr lang="lt-LT" dirty="0">
+                <a:solidFill>
+                  <a:srgbClr val="000000"/>
+                </a:solidFill>
+                <a:latin typeface="Calibri"/>
+              </a:rPr>
+              <a:t>. Šitą kartosim labai dažnai.</a:t>
             </a:r>
           </a:p>
         </p:txBody>
@@ -5744,7 +5773,7 @@
     </p:spTree>
     <p:extLst>
       <p:ext uri="{BB962C8B-B14F-4D97-AF65-F5344CB8AC3E}">
-        <p14:creationId xmlns:p14="http://schemas.microsoft.com/office/powerpoint/2010/main" val="4251665502"/>
+        <p14:creationId xmlns:p14="http://schemas.microsoft.com/office/powerpoint/2010/main" val="2560071035"/>
       </p:ext>
     </p:extLst>
   </p:cSld>
@@ -5776,7 +5805,7 @@
           <p:cNvPr id="2" name="Title 1">
             <a:extLst>
               <a:ext uri="{FF2B5EF4-FFF2-40B4-BE49-F238E27FC236}">
-                <a16:creationId xmlns:a16="http://schemas.microsoft.com/office/drawing/2014/main" id="{8FC39F93-FE39-6386-C684-89D1F2795116}"/>
+                <a16:creationId xmlns:a16="http://schemas.microsoft.com/office/drawing/2014/main" id="{141B987A-B059-A3B9-433D-55FE7C298362}"/>
               </a:ext>
             </a:extLst>
           </p:cNvPr>
@@ -5793,13 +5822,8 @@
           <a:lstStyle/>
           <a:p>
             <a:r>
-              <a:rPr lang="en-US" dirty="0" err="1">
-                <a:solidFill>
-                  <a:srgbClr val="000000"/>
-                </a:solidFill>
-                <a:latin typeface="Calibri"/>
-              </a:rPr>
-              <a:t>Išraiškos</a:t>
+              <a:rPr lang="lt-LT" dirty="0"/>
+              <a:t>Pasikalbėkime vėl su kompiuteriu</a:t>
             </a:r>
             <a:endParaRPr lang="en-US" dirty="0"/>
           </a:p>
@@ -5810,7 +5834,7 @@
           <p:cNvPr id="3" name="Content Placeholder 2">
             <a:extLst>
               <a:ext uri="{FF2B5EF4-FFF2-40B4-BE49-F238E27FC236}">
-                <a16:creationId xmlns:a16="http://schemas.microsoft.com/office/drawing/2014/main" id="{24C97B6D-A2A7-7667-053E-BDDB4FC44FC9}"/>
+                <a16:creationId xmlns:a16="http://schemas.microsoft.com/office/drawing/2014/main" id="{A76A4468-D134-3D2D-F6DE-E8BF28E5A74C}"/>
               </a:ext>
             </a:extLst>
           </p:cNvPr>
@@ -5826,75 +5850,30 @@
           <a:bodyPr/>
           <a:lstStyle/>
           <a:p>
-            <a:pPr>
-              <a:spcAft>
-                <a:spcPts val="400"/>
-              </a:spcAft>
-            </a:pPr>
-            <a:r>
-              <a:rPr lang="lt-LT" dirty="0">
-                <a:solidFill>
-                  <a:srgbClr val="000000"/>
-                </a:solidFill>
-                <a:latin typeface="Calibri"/>
-              </a:rPr>
-              <a:t> Išraiška – reikšmių, kintamųjų ir operatorių kombinacija, kuri pagamina naują reikšmę.</a:t>
-            </a:r>
-          </a:p>
-          <a:p>
-            <a:pPr>
-              <a:spcAft>
-                <a:spcPts val="400"/>
-              </a:spcAft>
-            </a:pPr>
-            <a:r>
-              <a:rPr lang="lt-LT" dirty="0">
-                <a:solidFill>
-                  <a:srgbClr val="000000"/>
-                </a:solidFill>
-                <a:latin typeface="Calibri"/>
-              </a:rPr>
-              <a:t> Kompiuteris ne „supranta formulę“, jis ją įvykdo pagal taisykles.</a:t>
-            </a:r>
-          </a:p>
-          <a:p>
-            <a:pPr>
-              <a:spcAft>
-                <a:spcPts val="400"/>
-              </a:spcAft>
-            </a:pPr>
-            <a:r>
-              <a:rPr lang="lt-LT" dirty="0">
-                <a:solidFill>
-                  <a:srgbClr val="000000"/>
-                </a:solidFill>
-                <a:latin typeface="Calibri"/>
-              </a:rPr>
-              <a:t> Jeigu neaišku kokia tvarka vyksta skaičiavimas – naudokit skliaustus.</a:t>
-            </a:r>
-          </a:p>
-          <a:p>
-            <a:pPr>
-              <a:spcAft>
-                <a:spcPts val="400"/>
-              </a:spcAft>
-            </a:pPr>
-            <a:r>
-              <a:rPr lang="lt-LT" dirty="0">
-                <a:solidFill>
-                  <a:srgbClr val="000000"/>
-                </a:solidFill>
-                <a:latin typeface="Calibri"/>
-              </a:rPr>
-              <a:t> Aiškumas &gt; bandymas atrodyti protingai.</a:t>
-            </a:r>
+            <a:r>
+              <a:rPr lang="lt-LT" dirty="0"/>
+              <a:t>Sukuriame kelis kintamuosius ir konstantas</a:t>
+            </a:r>
+          </a:p>
+          <a:p>
+            <a:r>
+              <a:rPr lang="lt-LT" dirty="0"/>
+              <a:t>Keičiame jų reikšmes</a:t>
+            </a:r>
+          </a:p>
+          <a:p>
+            <a:r>
+              <a:rPr lang="lt-LT" dirty="0"/>
+              <a:t>Skaičiuojame naujas reikšmes iš senų</a:t>
+            </a:r>
+            <a:endParaRPr lang="en-US" dirty="0"/>
           </a:p>
         </p:txBody>
       </p:sp>
     </p:spTree>
     <p:extLst>
       <p:ext uri="{BB962C8B-B14F-4D97-AF65-F5344CB8AC3E}">
-        <p14:creationId xmlns:p14="http://schemas.microsoft.com/office/powerpoint/2010/main" val="2133214070"/>
+        <p14:creationId xmlns:p14="http://schemas.microsoft.com/office/powerpoint/2010/main" val="2295014639"/>
       </p:ext>
     </p:extLst>
   </p:cSld>
@@ -5926,7 +5905,7 @@
           <p:cNvPr id="2" name="Title 1">
             <a:extLst>
               <a:ext uri="{FF2B5EF4-FFF2-40B4-BE49-F238E27FC236}">
-                <a16:creationId xmlns:a16="http://schemas.microsoft.com/office/drawing/2014/main" id="{D91727C6-8D42-E5C1-A7BC-6A447174B161}"/>
+                <a16:creationId xmlns:a16="http://schemas.microsoft.com/office/drawing/2014/main" id="{120AE951-C13A-90CE-2173-92F19476A82D}"/>
               </a:ext>
             </a:extLst>
           </p:cNvPr>
@@ -5943,12 +5922,49 @@
           <a:lstStyle/>
           <a:p>
             <a:r>
-              <a:rPr lang="en-US" dirty="0"/>
-              <a:t>K</a:t>
-            </a:r>
-            <a:r>
-              <a:rPr lang="lt-LT" dirty="0"/>
-              <a:t>ą aš tuo noriu pasakyti?</a:t>
+              <a:rPr lang="en-US" dirty="0" err="1">
+                <a:solidFill>
+                  <a:srgbClr val="000000"/>
+                </a:solidFill>
+                <a:latin typeface="Calibri"/>
+              </a:rPr>
+              <a:t>Operatoriai</a:t>
+            </a:r>
+            <a:r>
+              <a:rPr lang="en-US" dirty="0">
+                <a:solidFill>
+                  <a:srgbClr val="000000"/>
+                </a:solidFill>
+                <a:latin typeface="Calibri"/>
+              </a:rPr>
+              <a:t> </a:t>
+            </a:r>
+            <a:r>
+              <a:rPr lang="en-US" dirty="0" err="1">
+                <a:solidFill>
+                  <a:srgbClr val="000000"/>
+                </a:solidFill>
+                <a:latin typeface="Calibri"/>
+              </a:rPr>
+              <a:t>ir</a:t>
+            </a:r>
+            <a:r>
+              <a:rPr lang="en-US" dirty="0">
+                <a:solidFill>
+                  <a:srgbClr val="000000"/>
+                </a:solidFill>
+                <a:latin typeface="Calibri"/>
+              </a:rPr>
+              <a:t> </a:t>
+            </a:r>
+            <a:r>
+              <a:rPr lang="en-US" dirty="0" err="1">
+                <a:solidFill>
+                  <a:srgbClr val="000000"/>
+                </a:solidFill>
+                <a:latin typeface="Calibri"/>
+              </a:rPr>
+              <a:t>operandai</a:t>
             </a:r>
             <a:endParaRPr lang="en-US" dirty="0"/>
           </a:p>
@@ -5959,7 +5975,7 @@
           <p:cNvPr id="3" name="Content Placeholder 2">
             <a:extLst>
               <a:ext uri="{FF2B5EF4-FFF2-40B4-BE49-F238E27FC236}">
-                <a16:creationId xmlns:a16="http://schemas.microsoft.com/office/drawing/2014/main" id="{A3221943-FCCB-FF0A-CF33-FBD7BA05F53A}"/>
+                <a16:creationId xmlns:a16="http://schemas.microsoft.com/office/drawing/2014/main" id="{0F6CB657-9482-6EC7-6ECB-A2AC510657EA}"/>
               </a:ext>
             </a:extLst>
           </p:cNvPr>
@@ -5975,21 +5991,67 @@
           <a:bodyPr/>
           <a:lstStyle/>
           <a:p>
-            <a:r>
-              <a:rPr lang="lt-LT" dirty="0"/>
-              <a:t>Ta pati problema turi begalybe sprendimų</a:t>
-            </a:r>
-          </a:p>
-          <a:p>
-            <a:r>
-              <a:rPr lang="lt-LT" dirty="0"/>
-              <a:t>Iš esmės programavimas yra pasirinkimų menas. Kiekvienas pasirinkimas turi savo pliusus ir minusus.</a:t>
-            </a:r>
-          </a:p>
-          <a:p>
-            <a:r>
-              <a:rPr lang="lt-LT" dirty="0"/>
-              <a:t>Geriausias kodas yra aiškus, save dokumentuojantis ir su minimaliais kaštais atlieka savo paskirtį</a:t>
+            <a:pPr>
+              <a:spcAft>
+                <a:spcPts val="400"/>
+              </a:spcAft>
+            </a:pPr>
+            <a:r>
+              <a:rPr lang="lt-LT" dirty="0">
+                <a:solidFill>
+                  <a:srgbClr val="000000"/>
+                </a:solidFill>
+                <a:latin typeface="Calibri"/>
+              </a:rPr>
+              <a:t> Operatorius – simbolis / veiksmas, kuris kažką padaro su reikšmėmis.</a:t>
+            </a:r>
+          </a:p>
+          <a:p>
+            <a:pPr>
+              <a:spcAft>
+                <a:spcPts val="400"/>
+              </a:spcAft>
+            </a:pPr>
+            <a:r>
+              <a:rPr lang="lt-LT" dirty="0">
+                <a:solidFill>
+                  <a:srgbClr val="000000"/>
+                </a:solidFill>
+                <a:latin typeface="Calibri"/>
+              </a:rPr>
+              <a:t> Operandai – reikšmės su kuriomis tas operatorius dirba.</a:t>
+            </a:r>
+          </a:p>
+          <a:p>
+            <a:pPr>
+              <a:spcAft>
+                <a:spcPts val="400"/>
+              </a:spcAft>
+            </a:pPr>
+            <a:r>
+              <a:rPr lang="lt-LT" dirty="0">
+                <a:solidFill>
+                  <a:srgbClr val="000000"/>
+                </a:solidFill>
+                <a:latin typeface="Calibri"/>
+              </a:rPr>
+              <a:t> +, -, *, / – šiandien užtenka šitų.</a:t>
+            </a:r>
+          </a:p>
+          <a:p>
+            <a:pPr>
+              <a:spcAft>
+                <a:spcPts val="400"/>
+              </a:spcAft>
+            </a:pPr>
+            <a:r>
+              <a:rPr lang="lt-LT" dirty="0">
+                <a:solidFill>
+                  <a:srgbClr val="000000"/>
+                </a:solidFill>
+                <a:latin typeface="Calibri"/>
+              </a:rPr>
+              <a:t> Kol kas nebandykit įsiminti visų operatorių. Pirmiausia reikia pagauti pačią idėją.</a:t>
             </a:r>
           </a:p>
         </p:txBody>
@@ -5997,7 +6059,7 @@
     </p:spTree>
     <p:extLst>
       <p:ext uri="{BB962C8B-B14F-4D97-AF65-F5344CB8AC3E}">
-        <p14:creationId xmlns:p14="http://schemas.microsoft.com/office/powerpoint/2010/main" val="2901601973"/>
+        <p14:creationId xmlns:p14="http://schemas.microsoft.com/office/powerpoint/2010/main" val="4251665502"/>
       </p:ext>
     </p:extLst>
   </p:cSld>
@@ -6029,7 +6091,7 @@
           <p:cNvPr id="2" name="Title 1">
             <a:extLst>
               <a:ext uri="{FF2B5EF4-FFF2-40B4-BE49-F238E27FC236}">
-                <a16:creationId xmlns:a16="http://schemas.microsoft.com/office/drawing/2014/main" id="{A25191E1-2579-BBC0-3B30-645DC302AB38}"/>
+                <a16:creationId xmlns:a16="http://schemas.microsoft.com/office/drawing/2014/main" id="{8FC39F93-FE39-6386-C684-89D1F2795116}"/>
               </a:ext>
             </a:extLst>
           </p:cNvPr>
@@ -6052,25 +6114,7 @@
                 </a:solidFill>
                 <a:latin typeface="Calibri"/>
               </a:rPr>
-              <a:t>Vykdymo</a:t>
-            </a:r>
-            <a:r>
-              <a:rPr lang="en-US" dirty="0">
-                <a:solidFill>
-                  <a:srgbClr val="000000"/>
-                </a:solidFill>
-                <a:latin typeface="Calibri"/>
-              </a:rPr>
-              <a:t> </a:t>
-            </a:r>
-            <a:r>
-              <a:rPr lang="en-US" dirty="0" err="1">
-                <a:solidFill>
-                  <a:srgbClr val="000000"/>
-                </a:solidFill>
-                <a:latin typeface="Calibri"/>
-              </a:rPr>
-              <a:t>tvarka</a:t>
+              <a:t>Išraiškos</a:t>
             </a:r>
             <a:endParaRPr lang="en-US" dirty="0"/>
           </a:p>
@@ -6081,7 +6125,7 @@
           <p:cNvPr id="3" name="Content Placeholder 2">
             <a:extLst>
               <a:ext uri="{FF2B5EF4-FFF2-40B4-BE49-F238E27FC236}">
-                <a16:creationId xmlns:a16="http://schemas.microsoft.com/office/drawing/2014/main" id="{34A31C26-3485-55CB-7410-D77AD67D84BD}"/>
+                <a16:creationId xmlns:a16="http://schemas.microsoft.com/office/drawing/2014/main" id="{24C97B6D-A2A7-7667-053E-BDDB4FC44FC9}"/>
               </a:ext>
             </a:extLst>
           </p:cNvPr>
@@ -6109,7 +6153,7 @@
                 </a:solidFill>
                 <a:latin typeface="Calibri"/>
               </a:rPr>
-              <a:t> Programa vykdoma žingsnis po žingsnio.</a:t>
+              <a:t> Išraiška – reikšmių, kintamųjų ir operatorių kombinacija, kuri pagamina naują reikšmę.</a:t>
             </a:r>
           </a:p>
           <a:p>
@@ -6125,7 +6169,7 @@
                 </a:solidFill>
                 <a:latin typeface="Calibri"/>
               </a:rPr>
-              <a:t> Tvarka keičia rezultatą.</a:t>
+              <a:t> Kompiuteris ne „supranta formulę“, jis ją įvykdo pagal taisykles.</a:t>
             </a:r>
           </a:p>
           <a:p>
@@ -6141,7 +6185,7 @@
                 </a:solidFill>
                 <a:latin typeface="Calibri"/>
               </a:rPr>
-              <a:t> Jeigu viena eilutė priklauso nuo ankstesnės reikšmės, svarbu kas įvyko prieš tai.</a:t>
+              <a:t> Jeigu neaišku kokia tvarka vyksta skaičiavimas – naudokit skliaustus.</a:t>
             </a:r>
           </a:p>
           <a:p>
@@ -6157,18 +6201,15 @@
                 </a:solidFill>
                 <a:latin typeface="Calibri"/>
               </a:rPr>
-              <a:t> Todėl skaitydami kodą visada klausiame: kas yra tiesa dabar?</a:t>
-            </a:r>
-          </a:p>
-          <a:p>
-            <a:endParaRPr lang="en-US" dirty="0"/>
+              <a:t> Aiškumas &gt; bandymas atrodyti protingai.</a:t>
+            </a:r>
           </a:p>
         </p:txBody>
       </p:sp>
     </p:spTree>
     <p:extLst>
       <p:ext uri="{BB962C8B-B14F-4D97-AF65-F5344CB8AC3E}">
-        <p14:creationId xmlns:p14="http://schemas.microsoft.com/office/powerpoint/2010/main" val="1707537745"/>
+        <p14:creationId xmlns:p14="http://schemas.microsoft.com/office/powerpoint/2010/main" val="2133214070"/>
       </p:ext>
     </p:extLst>
   </p:cSld>
@@ -6200,7 +6241,7 @@
           <p:cNvPr id="2" name="Title 1">
             <a:extLst>
               <a:ext uri="{FF2B5EF4-FFF2-40B4-BE49-F238E27FC236}">
-                <a16:creationId xmlns:a16="http://schemas.microsoft.com/office/drawing/2014/main" id="{9B6E5593-F54F-C1A1-6B95-A552523E4CFC}"/>
+                <a16:creationId xmlns:a16="http://schemas.microsoft.com/office/drawing/2014/main" id="{D91727C6-8D42-E5C1-A7BC-6A447174B161}"/>
               </a:ext>
             </a:extLst>
           </p:cNvPr>
@@ -6217,13 +6258,12 @@
           <a:lstStyle/>
           <a:p>
             <a:r>
-              <a:rPr lang="en-US" dirty="0">
-                <a:solidFill>
-                  <a:srgbClr val="000000"/>
-                </a:solidFill>
-                <a:latin typeface="Calibri"/>
-              </a:rPr>
-              <a:t>Input → Processing → Output</a:t>
+              <a:rPr lang="en-US" dirty="0"/>
+              <a:t>K</a:t>
+            </a:r>
+            <a:r>
+              <a:rPr lang="lt-LT" dirty="0"/>
+              <a:t>ą aš tuo noriu pasakyti?</a:t>
             </a:r>
             <a:endParaRPr lang="en-US" dirty="0"/>
           </a:p>
@@ -6234,7 +6274,7 @@
           <p:cNvPr id="3" name="Content Placeholder 2">
             <a:extLst>
               <a:ext uri="{FF2B5EF4-FFF2-40B4-BE49-F238E27FC236}">
-                <a16:creationId xmlns:a16="http://schemas.microsoft.com/office/drawing/2014/main" id="{2762F29D-CB8B-FD4A-BAD2-5AF93A7D6BED}"/>
+                <a16:creationId xmlns:a16="http://schemas.microsoft.com/office/drawing/2014/main" id="{A3221943-FCCB-FF0A-CF33-FBD7BA05F53A}"/>
               </a:ext>
             </a:extLst>
           </p:cNvPr>
@@ -6250,420 +6290,29 @@
           <a:bodyPr/>
           <a:lstStyle/>
           <a:p>
-            <a:pPr>
-              <a:spcAft>
-                <a:spcPts val="400"/>
-              </a:spcAft>
-            </a:pPr>
-            <a:r>
-              <a:rPr lang="en-US" dirty="0">
-                <a:solidFill>
-                  <a:srgbClr val="000000"/>
-                </a:solidFill>
-                <a:latin typeface="Calibri"/>
-              </a:rPr>
-              <a:t> Input – </a:t>
-            </a:r>
-            <a:r>
-              <a:rPr lang="en-US" dirty="0" err="1">
-                <a:solidFill>
-                  <a:srgbClr val="000000"/>
-                </a:solidFill>
-                <a:latin typeface="Calibri"/>
-              </a:rPr>
-              <a:t>informacija</a:t>
-            </a:r>
-            <a:r>
-              <a:rPr lang="en-US" dirty="0">
-                <a:solidFill>
-                  <a:srgbClr val="000000"/>
-                </a:solidFill>
-                <a:latin typeface="Calibri"/>
-              </a:rPr>
-              <a:t> </a:t>
-            </a:r>
-            <a:r>
-              <a:rPr lang="en-US" dirty="0" err="1">
-                <a:solidFill>
-                  <a:srgbClr val="000000"/>
-                </a:solidFill>
-                <a:latin typeface="Calibri"/>
-              </a:rPr>
-              <a:t>ateina</a:t>
-            </a:r>
-            <a:r>
-              <a:rPr lang="en-US" dirty="0">
-                <a:solidFill>
-                  <a:srgbClr val="000000"/>
-                </a:solidFill>
-                <a:latin typeface="Calibri"/>
-              </a:rPr>
-              <a:t> į </a:t>
-            </a:r>
-            <a:r>
-              <a:rPr lang="en-US" dirty="0" err="1">
-                <a:solidFill>
-                  <a:srgbClr val="000000"/>
-                </a:solidFill>
-                <a:latin typeface="Calibri"/>
-              </a:rPr>
-              <a:t>programą</a:t>
-            </a:r>
-            <a:r>
-              <a:rPr lang="en-US" dirty="0">
-                <a:solidFill>
-                  <a:srgbClr val="000000"/>
-                </a:solidFill>
-                <a:latin typeface="Calibri"/>
-              </a:rPr>
-              <a:t>.</a:t>
-            </a:r>
-          </a:p>
-          <a:p>
-            <a:pPr>
-              <a:spcAft>
-                <a:spcPts val="400"/>
-              </a:spcAft>
-            </a:pPr>
-            <a:r>
-              <a:rPr lang="en-US" dirty="0">
-                <a:solidFill>
-                  <a:srgbClr val="000000"/>
-                </a:solidFill>
-                <a:latin typeface="Calibri"/>
-              </a:rPr>
-              <a:t> Processing – </a:t>
-            </a:r>
-            <a:r>
-              <a:rPr lang="en-US" dirty="0" err="1">
-                <a:solidFill>
-                  <a:srgbClr val="000000"/>
-                </a:solidFill>
-                <a:latin typeface="Calibri"/>
-              </a:rPr>
-              <a:t>programa</a:t>
-            </a:r>
-            <a:r>
-              <a:rPr lang="en-US" dirty="0">
-                <a:solidFill>
-                  <a:srgbClr val="000000"/>
-                </a:solidFill>
-                <a:latin typeface="Calibri"/>
-              </a:rPr>
-              <a:t> </a:t>
-            </a:r>
-            <a:r>
-              <a:rPr lang="en-US" dirty="0" err="1">
-                <a:solidFill>
-                  <a:srgbClr val="000000"/>
-                </a:solidFill>
-                <a:latin typeface="Calibri"/>
-              </a:rPr>
-              <a:t>ją</a:t>
-            </a:r>
-            <a:r>
-              <a:rPr lang="en-US" dirty="0">
-                <a:solidFill>
-                  <a:srgbClr val="000000"/>
-                </a:solidFill>
-                <a:latin typeface="Calibri"/>
-              </a:rPr>
-              <a:t> </a:t>
-            </a:r>
-            <a:r>
-              <a:rPr lang="en-US" dirty="0" err="1">
-                <a:solidFill>
-                  <a:srgbClr val="000000"/>
-                </a:solidFill>
-                <a:latin typeface="Calibri"/>
-              </a:rPr>
-              <a:t>apdoroja</a:t>
-            </a:r>
-            <a:r>
-              <a:rPr lang="en-US" dirty="0">
-                <a:solidFill>
-                  <a:srgbClr val="000000"/>
-                </a:solidFill>
-                <a:latin typeface="Calibri"/>
-              </a:rPr>
-              <a:t>.</a:t>
-            </a:r>
-          </a:p>
-          <a:p>
-            <a:pPr>
-              <a:spcAft>
-                <a:spcPts val="400"/>
-              </a:spcAft>
-            </a:pPr>
-            <a:r>
-              <a:rPr lang="en-US" dirty="0">
-                <a:solidFill>
-                  <a:srgbClr val="000000"/>
-                </a:solidFill>
-                <a:latin typeface="Calibri"/>
-              </a:rPr>
-              <a:t> Output – </a:t>
-            </a:r>
-            <a:r>
-              <a:rPr lang="en-US" dirty="0" err="1">
-                <a:solidFill>
-                  <a:srgbClr val="000000"/>
-                </a:solidFill>
-                <a:latin typeface="Calibri"/>
-              </a:rPr>
-              <a:t>programa</a:t>
-            </a:r>
-            <a:r>
-              <a:rPr lang="en-US" dirty="0">
-                <a:solidFill>
-                  <a:srgbClr val="000000"/>
-                </a:solidFill>
-                <a:latin typeface="Calibri"/>
-              </a:rPr>
-              <a:t> </a:t>
-            </a:r>
-            <a:r>
-              <a:rPr lang="en-US" dirty="0" err="1">
-                <a:solidFill>
-                  <a:srgbClr val="000000"/>
-                </a:solidFill>
-                <a:latin typeface="Calibri"/>
-              </a:rPr>
-              <a:t>kažką</a:t>
-            </a:r>
-            <a:r>
-              <a:rPr lang="en-US" dirty="0">
-                <a:solidFill>
-                  <a:srgbClr val="000000"/>
-                </a:solidFill>
-                <a:latin typeface="Calibri"/>
-              </a:rPr>
-              <a:t> </a:t>
-            </a:r>
-            <a:r>
-              <a:rPr lang="en-US" dirty="0" err="1">
-                <a:solidFill>
-                  <a:srgbClr val="000000"/>
-                </a:solidFill>
-                <a:latin typeface="Calibri"/>
-              </a:rPr>
-              <a:t>grąžina</a:t>
-            </a:r>
-            <a:r>
-              <a:rPr lang="en-US" dirty="0">
-                <a:solidFill>
-                  <a:srgbClr val="000000"/>
-                </a:solidFill>
-                <a:latin typeface="Calibri"/>
-              </a:rPr>
-              <a:t> </a:t>
-            </a:r>
-            <a:r>
-              <a:rPr lang="en-US" dirty="0" err="1">
-                <a:solidFill>
-                  <a:srgbClr val="000000"/>
-                </a:solidFill>
-                <a:latin typeface="Calibri"/>
-              </a:rPr>
-              <a:t>arba</a:t>
-            </a:r>
-            <a:r>
-              <a:rPr lang="en-US" dirty="0">
-                <a:solidFill>
-                  <a:srgbClr val="000000"/>
-                </a:solidFill>
-                <a:latin typeface="Calibri"/>
-              </a:rPr>
-              <a:t> </a:t>
-            </a:r>
-            <a:r>
-              <a:rPr lang="en-US" dirty="0" err="1">
-                <a:solidFill>
-                  <a:srgbClr val="000000"/>
-                </a:solidFill>
-                <a:latin typeface="Calibri"/>
-              </a:rPr>
-              <a:t>parodo</a:t>
-            </a:r>
-            <a:r>
-              <a:rPr lang="en-US" dirty="0">
-                <a:solidFill>
-                  <a:srgbClr val="000000"/>
-                </a:solidFill>
-                <a:latin typeface="Calibri"/>
-              </a:rPr>
-              <a:t>.</a:t>
-            </a:r>
-          </a:p>
-          <a:p>
-            <a:pPr>
-              <a:spcAft>
-                <a:spcPts val="400"/>
-              </a:spcAft>
-            </a:pPr>
-            <a:r>
-              <a:rPr lang="en-US" dirty="0">
-                <a:solidFill>
-                  <a:srgbClr val="000000"/>
-                </a:solidFill>
-                <a:latin typeface="Calibri"/>
-              </a:rPr>
-              <a:t> </a:t>
-            </a:r>
-            <a:r>
-              <a:rPr lang="en-US" dirty="0" err="1">
-                <a:solidFill>
-                  <a:srgbClr val="000000"/>
-                </a:solidFill>
-                <a:latin typeface="Calibri"/>
-              </a:rPr>
-              <a:t>Skirtingos</a:t>
-            </a:r>
-            <a:r>
-              <a:rPr lang="en-US" dirty="0">
-                <a:solidFill>
-                  <a:srgbClr val="000000"/>
-                </a:solidFill>
-                <a:latin typeface="Calibri"/>
-              </a:rPr>
-              <a:t> </a:t>
-            </a:r>
-            <a:r>
-              <a:rPr lang="en-US" dirty="0" err="1">
-                <a:solidFill>
-                  <a:srgbClr val="000000"/>
-                </a:solidFill>
-                <a:latin typeface="Calibri"/>
-              </a:rPr>
-              <a:t>programos</a:t>
-            </a:r>
-            <a:r>
-              <a:rPr lang="en-US" dirty="0">
-                <a:solidFill>
-                  <a:srgbClr val="000000"/>
-                </a:solidFill>
-                <a:latin typeface="Calibri"/>
-              </a:rPr>
-              <a:t> </a:t>
-            </a:r>
-            <a:r>
-              <a:rPr lang="en-US" dirty="0" err="1">
-                <a:solidFill>
-                  <a:srgbClr val="000000"/>
-                </a:solidFill>
-                <a:latin typeface="Calibri"/>
-              </a:rPr>
-              <a:t>atrodo</a:t>
-            </a:r>
-            <a:r>
-              <a:rPr lang="en-US" dirty="0">
-                <a:solidFill>
-                  <a:srgbClr val="000000"/>
-                </a:solidFill>
-                <a:latin typeface="Calibri"/>
-              </a:rPr>
-              <a:t> </a:t>
-            </a:r>
-            <a:r>
-              <a:rPr lang="en-US" dirty="0" err="1">
-                <a:solidFill>
-                  <a:srgbClr val="000000"/>
-                </a:solidFill>
-                <a:latin typeface="Calibri"/>
-              </a:rPr>
-              <a:t>skirtingai</a:t>
-            </a:r>
-            <a:r>
-              <a:rPr lang="en-US" dirty="0">
-                <a:solidFill>
-                  <a:srgbClr val="000000"/>
-                </a:solidFill>
-                <a:latin typeface="Calibri"/>
-              </a:rPr>
-              <a:t>, bet </a:t>
-            </a:r>
-            <a:r>
-              <a:rPr lang="en-US" dirty="0" err="1">
-                <a:solidFill>
-                  <a:srgbClr val="000000"/>
-                </a:solidFill>
-                <a:latin typeface="Calibri"/>
-              </a:rPr>
-              <a:t>šitas</a:t>
-            </a:r>
-            <a:r>
-              <a:rPr lang="en-US" dirty="0">
-                <a:solidFill>
-                  <a:srgbClr val="000000"/>
-                </a:solidFill>
-                <a:latin typeface="Calibri"/>
-              </a:rPr>
-              <a:t> </a:t>
-            </a:r>
-            <a:r>
-              <a:rPr lang="en-US" dirty="0" err="1">
-                <a:solidFill>
-                  <a:srgbClr val="000000"/>
-                </a:solidFill>
-                <a:latin typeface="Calibri"/>
-              </a:rPr>
-              <a:t>modelis</a:t>
-            </a:r>
-            <a:r>
-              <a:rPr lang="en-US" dirty="0">
-                <a:solidFill>
-                  <a:srgbClr val="000000"/>
-                </a:solidFill>
-                <a:latin typeface="Calibri"/>
-              </a:rPr>
-              <a:t> </a:t>
-            </a:r>
-            <a:r>
-              <a:rPr lang="en-US" dirty="0" err="1">
-                <a:solidFill>
-                  <a:srgbClr val="000000"/>
-                </a:solidFill>
-                <a:latin typeface="Calibri"/>
-              </a:rPr>
-              <a:t>atsikartoja</a:t>
-            </a:r>
-            <a:r>
-              <a:rPr lang="en-US" dirty="0">
-                <a:solidFill>
-                  <a:srgbClr val="000000"/>
-                </a:solidFill>
-                <a:latin typeface="Calibri"/>
-              </a:rPr>
-              <a:t> </a:t>
-            </a:r>
-            <a:r>
-              <a:rPr lang="en-US" dirty="0" err="1">
-                <a:solidFill>
-                  <a:srgbClr val="000000"/>
-                </a:solidFill>
-                <a:latin typeface="Calibri"/>
-              </a:rPr>
-              <a:t>visur</a:t>
-            </a:r>
-            <a:r>
-              <a:rPr lang="en-US" dirty="0">
-                <a:solidFill>
-                  <a:srgbClr val="000000"/>
-                </a:solidFill>
-                <a:latin typeface="Calibri"/>
-              </a:rPr>
-              <a:t>.</a:t>
-            </a:r>
-          </a:p>
-          <a:p>
-            <a:endParaRPr lang="en-US" dirty="0"/>
+            <a:r>
+              <a:rPr lang="lt-LT" dirty="0"/>
+              <a:t>Ta pati problema turi begalybe sprendimų</a:t>
+            </a:r>
+          </a:p>
+          <a:p>
+            <a:r>
+              <a:rPr lang="lt-LT" dirty="0"/>
+              <a:t>Iš esmės programavimas yra pasirinkimų menas. Kiekvienas pasirinkimas turi savo pliusus ir minusus.</a:t>
+            </a:r>
+          </a:p>
+          <a:p>
+            <a:r>
+              <a:rPr lang="lt-LT" dirty="0"/>
+              <a:t>Geriausias kodas yra aiškus, save dokumentuojantis ir su minimaliais kaštais atlieka savo paskirtį</a:t>
+            </a:r>
           </a:p>
         </p:txBody>
       </p:sp>
     </p:spTree>
     <p:extLst>
       <p:ext uri="{BB962C8B-B14F-4D97-AF65-F5344CB8AC3E}">
-        <p14:creationId xmlns:p14="http://schemas.microsoft.com/office/powerpoint/2010/main" val="2823183192"/>
+        <p14:creationId xmlns:p14="http://schemas.microsoft.com/office/powerpoint/2010/main" val="2901601973"/>
       </p:ext>
     </p:extLst>
   </p:cSld>
@@ -6695,7 +6344,7 @@
           <p:cNvPr id="2" name="Title 1">
             <a:extLst>
               <a:ext uri="{FF2B5EF4-FFF2-40B4-BE49-F238E27FC236}">
-                <a16:creationId xmlns:a16="http://schemas.microsoft.com/office/drawing/2014/main" id="{6CC40B9D-4E72-BB9C-B498-66E6E830BFA1}"/>
+                <a16:creationId xmlns:a16="http://schemas.microsoft.com/office/drawing/2014/main" id="{A25191E1-2579-BBC0-3B30-645DC302AB38}"/>
               </a:ext>
             </a:extLst>
           </p:cNvPr>
@@ -6712,13 +6361,31 @@
           <a:lstStyle/>
           <a:p>
             <a:r>
-              <a:rPr lang="lt-LT" dirty="0">
-                <a:solidFill>
-                  <a:srgbClr val="000000"/>
-                </a:solidFill>
-                <a:latin typeface="Calibri"/>
-              </a:rPr>
-              <a:t>Kur tai matosi realybėje?</a:t>
+              <a:rPr lang="en-US" dirty="0" err="1">
+                <a:solidFill>
+                  <a:srgbClr val="000000"/>
+                </a:solidFill>
+                <a:latin typeface="Calibri"/>
+              </a:rPr>
+              <a:t>Vykdymo</a:t>
+            </a:r>
+            <a:r>
+              <a:rPr lang="en-US" dirty="0">
+                <a:solidFill>
+                  <a:srgbClr val="000000"/>
+                </a:solidFill>
+                <a:latin typeface="Calibri"/>
+              </a:rPr>
+              <a:t> </a:t>
+            </a:r>
+            <a:r>
+              <a:rPr lang="en-US" dirty="0" err="1">
+                <a:solidFill>
+                  <a:srgbClr val="000000"/>
+                </a:solidFill>
+                <a:latin typeface="Calibri"/>
+              </a:rPr>
+              <a:t>tvarka</a:t>
             </a:r>
             <a:endParaRPr lang="en-US" dirty="0"/>
           </a:p>
@@ -6729,7 +6396,7 @@
           <p:cNvPr id="3" name="Content Placeholder 2">
             <a:extLst>
               <a:ext uri="{FF2B5EF4-FFF2-40B4-BE49-F238E27FC236}">
-                <a16:creationId xmlns:a16="http://schemas.microsoft.com/office/drawing/2014/main" id="{0AE76D98-84D1-27DD-484F-D1956ABFE4FD}"/>
+                <a16:creationId xmlns:a16="http://schemas.microsoft.com/office/drawing/2014/main" id="{34A31C26-3485-55CB-7410-D77AD67D84BD}"/>
               </a:ext>
             </a:extLst>
           </p:cNvPr>
@@ -6757,7 +6424,7 @@
                 </a:solidFill>
                 <a:latin typeface="Calibri"/>
               </a:rPr>
-              <a:t> Skaičiuotuvas: skaičiai → veiksmai → atsakymas.</a:t>
+              <a:t> Programa vykdoma žingsnis po žingsnio.</a:t>
             </a:r>
           </a:p>
           <a:p>
@@ -6773,7 +6440,7 @@
                 </a:solidFill>
                 <a:latin typeface="Calibri"/>
               </a:rPr>
-              <a:t> Žaidimas: žaidėjo veiksmas → taisyklės → pasikeitusi būsena.</a:t>
+              <a:t> Tvarka keičia rezultatą.</a:t>
             </a:r>
           </a:p>
           <a:p>
@@ -6789,7 +6456,7 @@
                 </a:solidFill>
                 <a:latin typeface="Calibri"/>
               </a:rPr>
-              <a:t> Automatizacija: failai → apdorojimas → sutvarkyti failai.</a:t>
+              <a:t> Jeigu viena eilutė priklauso nuo ankstesnės reikšmės, svarbu kas įvyko prieš tai.</a:t>
             </a:r>
           </a:p>
           <a:p>
@@ -6805,7 +6472,7 @@
                 </a:solidFill>
                 <a:latin typeface="Calibri"/>
               </a:rPr>
-              <a:t> Modelis / simuliacija: parametrai → skaičiavimai → prognozė.</a:t>
+              <a:t> Todėl skaitydami kodą visada klausiame: kas yra tiesa dabar?</a:t>
             </a:r>
           </a:p>
           <a:p>
@@ -6816,7 +6483,7 @@
     </p:spTree>
     <p:extLst>
       <p:ext uri="{BB962C8B-B14F-4D97-AF65-F5344CB8AC3E}">
-        <p14:creationId xmlns:p14="http://schemas.microsoft.com/office/powerpoint/2010/main" val="1023334561"/>
+        <p14:creationId xmlns:p14="http://schemas.microsoft.com/office/powerpoint/2010/main" val="1707537745"/>
       </p:ext>
     </p:extLst>
   </p:cSld>
@@ -6848,7 +6515,7 @@
           <p:cNvPr id="2" name="Title 1">
             <a:extLst>
               <a:ext uri="{FF2B5EF4-FFF2-40B4-BE49-F238E27FC236}">
-                <a16:creationId xmlns:a16="http://schemas.microsoft.com/office/drawing/2014/main" id="{51ED2129-9BED-4AAB-F022-FC8E44EAEB06}"/>
+                <a16:creationId xmlns:a16="http://schemas.microsoft.com/office/drawing/2014/main" id="{9B6E5593-F54F-C1A1-6B95-A552523E4CFC}"/>
               </a:ext>
             </a:extLst>
           </p:cNvPr>
@@ -6865,16 +6532,13 @@
           <a:lstStyle/>
           <a:p>
             <a:r>
-              <a:rPr lang="lt-LT" dirty="0"/>
-              <a:t>Dabar jau </a:t>
-            </a:r>
-            <a:r>
-              <a:rPr lang="lt-LT" dirty="0" err="1"/>
-              <a:t>biški</a:t>
-            </a:r>
-            <a:r>
-              <a:rPr lang="lt-LT" dirty="0"/>
-              <a:t> rimčiau</a:t>
+              <a:rPr lang="en-US" dirty="0">
+                <a:solidFill>
+                  <a:srgbClr val="000000"/>
+                </a:solidFill>
+                <a:latin typeface="Calibri"/>
+              </a:rPr>
+              <a:t>Input → Processing → Output</a:t>
             </a:r>
             <a:endParaRPr lang="en-US" dirty="0"/>
           </a:p>
@@ -6885,7 +6549,7 @@
           <p:cNvPr id="3" name="Content Placeholder 2">
             <a:extLst>
               <a:ext uri="{FF2B5EF4-FFF2-40B4-BE49-F238E27FC236}">
-                <a16:creationId xmlns:a16="http://schemas.microsoft.com/office/drawing/2014/main" id="{266951E7-0FFF-10CE-F5ED-F90A0AFB1CF2}"/>
+                <a16:creationId xmlns:a16="http://schemas.microsoft.com/office/drawing/2014/main" id="{2762F29D-CB8B-FD4A-BAD2-5AF93A7D6BED}"/>
               </a:ext>
             </a:extLst>
           </p:cNvPr>
@@ -6901,84 +6565,420 @@
           <a:bodyPr/>
           <a:lstStyle/>
           <a:p>
-            <a:r>
-              <a:rPr lang="lt-LT" dirty="0"/>
-              <a:t>Parašysime kartu programą, kuri paklausia kelių reikšmių</a:t>
-            </a:r>
-          </a:p>
-          <a:p>
-            <a:r>
-              <a:rPr lang="lt-LT" dirty="0"/>
-              <a:t>Programa jas panaudoja skaičiavimui</a:t>
-            </a:r>
-          </a:p>
-          <a:p>
-            <a:r>
-              <a:rPr lang="lt-LT" dirty="0"/>
-              <a:t>Programa aiškiai parodo rezultatą</a:t>
-            </a:r>
-          </a:p>
-          <a:p>
-            <a:pPr marL="0" indent="0">
-              <a:buNone/>
+            <a:pPr>
+              <a:spcAft>
+                <a:spcPts val="400"/>
+              </a:spcAft>
             </a:pPr>
-            <a:endParaRPr lang="lt-LT" dirty="0"/>
-          </a:p>
-          <a:p>
-            <a:pPr marL="0" indent="0">
-              <a:buNone/>
+            <a:r>
+              <a:rPr lang="en-US" dirty="0">
+                <a:solidFill>
+                  <a:srgbClr val="000000"/>
+                </a:solidFill>
+                <a:latin typeface="Calibri"/>
+              </a:rPr>
+              <a:t> Input – </a:t>
+            </a:r>
+            <a:r>
+              <a:rPr lang="en-US" dirty="0" err="1">
+                <a:solidFill>
+                  <a:srgbClr val="000000"/>
+                </a:solidFill>
+                <a:latin typeface="Calibri"/>
+              </a:rPr>
+              <a:t>informacija</a:t>
+            </a:r>
+            <a:r>
+              <a:rPr lang="en-US" dirty="0">
+                <a:solidFill>
+                  <a:srgbClr val="000000"/>
+                </a:solidFill>
+                <a:latin typeface="Calibri"/>
+              </a:rPr>
+              <a:t> </a:t>
+            </a:r>
+            <a:r>
+              <a:rPr lang="en-US" dirty="0" err="1">
+                <a:solidFill>
+                  <a:srgbClr val="000000"/>
+                </a:solidFill>
+                <a:latin typeface="Calibri"/>
+              </a:rPr>
+              <a:t>ateina</a:t>
+            </a:r>
+            <a:r>
+              <a:rPr lang="en-US" dirty="0">
+                <a:solidFill>
+                  <a:srgbClr val="000000"/>
+                </a:solidFill>
+                <a:latin typeface="Calibri"/>
+              </a:rPr>
+              <a:t> į </a:t>
+            </a:r>
+            <a:r>
+              <a:rPr lang="en-US" dirty="0" err="1">
+                <a:solidFill>
+                  <a:srgbClr val="000000"/>
+                </a:solidFill>
+                <a:latin typeface="Calibri"/>
+              </a:rPr>
+              <a:t>programą</a:t>
+            </a:r>
+            <a:r>
+              <a:rPr lang="en-US" dirty="0">
+                <a:solidFill>
+                  <a:srgbClr val="000000"/>
+                </a:solidFill>
+                <a:latin typeface="Calibri"/>
+              </a:rPr>
+              <a:t>.</a:t>
+            </a:r>
+          </a:p>
+          <a:p>
+            <a:pPr>
+              <a:spcAft>
+                <a:spcPts val="400"/>
+              </a:spcAft>
             </a:pPr>
-            <a:endParaRPr lang="lt-LT" dirty="0"/>
-          </a:p>
-          <a:p>
-            <a:pPr marL="0" indent="0">
-              <a:buNone/>
+            <a:r>
+              <a:rPr lang="en-US" dirty="0">
+                <a:solidFill>
+                  <a:srgbClr val="000000"/>
+                </a:solidFill>
+                <a:latin typeface="Calibri"/>
+              </a:rPr>
+              <a:t> Processing – </a:t>
+            </a:r>
+            <a:r>
+              <a:rPr lang="en-US" dirty="0" err="1">
+                <a:solidFill>
+                  <a:srgbClr val="000000"/>
+                </a:solidFill>
+                <a:latin typeface="Calibri"/>
+              </a:rPr>
+              <a:t>programa</a:t>
+            </a:r>
+            <a:r>
+              <a:rPr lang="en-US" dirty="0">
+                <a:solidFill>
+                  <a:srgbClr val="000000"/>
+                </a:solidFill>
+                <a:latin typeface="Calibri"/>
+              </a:rPr>
+              <a:t> </a:t>
+            </a:r>
+            <a:r>
+              <a:rPr lang="en-US" dirty="0" err="1">
+                <a:solidFill>
+                  <a:srgbClr val="000000"/>
+                </a:solidFill>
+                <a:latin typeface="Calibri"/>
+              </a:rPr>
+              <a:t>ją</a:t>
+            </a:r>
+            <a:r>
+              <a:rPr lang="en-US" dirty="0">
+                <a:solidFill>
+                  <a:srgbClr val="000000"/>
+                </a:solidFill>
+                <a:latin typeface="Calibri"/>
+              </a:rPr>
+              <a:t> </a:t>
+            </a:r>
+            <a:r>
+              <a:rPr lang="en-US" dirty="0" err="1">
+                <a:solidFill>
+                  <a:srgbClr val="000000"/>
+                </a:solidFill>
+                <a:latin typeface="Calibri"/>
+              </a:rPr>
+              <a:t>apdoroja</a:t>
+            </a:r>
+            <a:r>
+              <a:rPr lang="en-US" dirty="0">
+                <a:solidFill>
+                  <a:srgbClr val="000000"/>
+                </a:solidFill>
+                <a:latin typeface="Calibri"/>
+              </a:rPr>
+              <a:t>.</a:t>
+            </a:r>
+          </a:p>
+          <a:p>
+            <a:pPr>
+              <a:spcAft>
+                <a:spcPts val="400"/>
+              </a:spcAft>
             </a:pPr>
             <a:r>
-              <a:rPr lang="lt-LT" dirty="0"/>
-              <a:t>Naudosime:</a:t>
-            </a:r>
-          </a:p>
-          <a:p>
-            <a:pPr marL="0" indent="0">
-              <a:buNone/>
+              <a:rPr lang="en-US" dirty="0">
+                <a:solidFill>
+                  <a:srgbClr val="000000"/>
+                </a:solidFill>
+                <a:latin typeface="Calibri"/>
+              </a:rPr>
+              <a:t> Output – </a:t>
+            </a:r>
+            <a:r>
+              <a:rPr lang="en-US" dirty="0" err="1">
+                <a:solidFill>
+                  <a:srgbClr val="000000"/>
+                </a:solidFill>
+                <a:latin typeface="Calibri"/>
+              </a:rPr>
+              <a:t>programa</a:t>
+            </a:r>
+            <a:r>
+              <a:rPr lang="en-US" dirty="0">
+                <a:solidFill>
+                  <a:srgbClr val="000000"/>
+                </a:solidFill>
+                <a:latin typeface="Calibri"/>
+              </a:rPr>
+              <a:t> </a:t>
+            </a:r>
+            <a:r>
+              <a:rPr lang="en-US" dirty="0" err="1">
+                <a:solidFill>
+                  <a:srgbClr val="000000"/>
+                </a:solidFill>
+                <a:latin typeface="Calibri"/>
+              </a:rPr>
+              <a:t>kažką</a:t>
+            </a:r>
+            <a:r>
+              <a:rPr lang="en-US" dirty="0">
+                <a:solidFill>
+                  <a:srgbClr val="000000"/>
+                </a:solidFill>
+                <a:latin typeface="Calibri"/>
+              </a:rPr>
+              <a:t> </a:t>
+            </a:r>
+            <a:r>
+              <a:rPr lang="en-US" dirty="0" err="1">
+                <a:solidFill>
+                  <a:srgbClr val="000000"/>
+                </a:solidFill>
+                <a:latin typeface="Calibri"/>
+              </a:rPr>
+              <a:t>grąžina</a:t>
+            </a:r>
+            <a:r>
+              <a:rPr lang="en-US" dirty="0">
+                <a:solidFill>
+                  <a:srgbClr val="000000"/>
+                </a:solidFill>
+                <a:latin typeface="Calibri"/>
+              </a:rPr>
+              <a:t> </a:t>
+            </a:r>
+            <a:r>
+              <a:rPr lang="en-US" dirty="0" err="1">
+                <a:solidFill>
+                  <a:srgbClr val="000000"/>
+                </a:solidFill>
+                <a:latin typeface="Calibri"/>
+              </a:rPr>
+              <a:t>arba</a:t>
+            </a:r>
+            <a:r>
+              <a:rPr lang="en-US" dirty="0">
+                <a:solidFill>
+                  <a:srgbClr val="000000"/>
+                </a:solidFill>
+                <a:latin typeface="Calibri"/>
+              </a:rPr>
+              <a:t> </a:t>
+            </a:r>
+            <a:r>
+              <a:rPr lang="en-US" dirty="0" err="1">
+                <a:solidFill>
+                  <a:srgbClr val="000000"/>
+                </a:solidFill>
+                <a:latin typeface="Calibri"/>
+              </a:rPr>
+              <a:t>parodo</a:t>
+            </a:r>
+            <a:r>
+              <a:rPr lang="en-US" dirty="0">
+                <a:solidFill>
+                  <a:srgbClr val="000000"/>
+                </a:solidFill>
+                <a:latin typeface="Calibri"/>
+              </a:rPr>
+              <a:t>.</a:t>
+            </a:r>
+          </a:p>
+          <a:p>
+            <a:pPr>
+              <a:spcAft>
+                <a:spcPts val="400"/>
+              </a:spcAft>
             </a:pPr>
             <a:r>
-              <a:rPr lang="en-US" dirty="0"/>
-              <a:t>var = input()</a:t>
-            </a:r>
-          </a:p>
-          <a:p>
-            <a:pPr marL="0" indent="0">
-              <a:buNone/>
-            </a:pPr>
-            <a:r>
-              <a:rPr lang="en-US" dirty="0"/>
-              <a:t>Print(</a:t>
-            </a:r>
-            <a:r>
-              <a:rPr lang="en-US" dirty="0" err="1"/>
-              <a:t>apdorotas</a:t>
-            </a:r>
-            <a:r>
-              <a:rPr lang="en-US" dirty="0"/>
+              <a:rPr lang="en-US" dirty="0">
+                <a:solidFill>
+                  <a:srgbClr val="000000"/>
+                </a:solidFill>
+                <a:latin typeface="Calibri"/>
+              </a:rPr>
               <a:t> </a:t>
             </a:r>
             <a:r>
-              <a:rPr lang="en-US" dirty="0" err="1"/>
-              <a:t>kintamasis</a:t>
-            </a:r>
-            <a:r>
-              <a:rPr lang="en-US" dirty="0"/>
-              <a:t>)</a:t>
-            </a:r>
+              <a:rPr lang="en-US" dirty="0" err="1">
+                <a:solidFill>
+                  <a:srgbClr val="000000"/>
+                </a:solidFill>
+                <a:latin typeface="Calibri"/>
+              </a:rPr>
+              <a:t>Skirtingos</a:t>
+            </a:r>
+            <a:r>
+              <a:rPr lang="en-US" dirty="0">
+                <a:solidFill>
+                  <a:srgbClr val="000000"/>
+                </a:solidFill>
+                <a:latin typeface="Calibri"/>
+              </a:rPr>
+              <a:t> </a:t>
+            </a:r>
+            <a:r>
+              <a:rPr lang="en-US" dirty="0" err="1">
+                <a:solidFill>
+                  <a:srgbClr val="000000"/>
+                </a:solidFill>
+                <a:latin typeface="Calibri"/>
+              </a:rPr>
+              <a:t>programos</a:t>
+            </a:r>
+            <a:r>
+              <a:rPr lang="en-US" dirty="0">
+                <a:solidFill>
+                  <a:srgbClr val="000000"/>
+                </a:solidFill>
+                <a:latin typeface="Calibri"/>
+              </a:rPr>
+              <a:t> </a:t>
+            </a:r>
+            <a:r>
+              <a:rPr lang="en-US" dirty="0" err="1">
+                <a:solidFill>
+                  <a:srgbClr val="000000"/>
+                </a:solidFill>
+                <a:latin typeface="Calibri"/>
+              </a:rPr>
+              <a:t>atrodo</a:t>
+            </a:r>
+            <a:r>
+              <a:rPr lang="en-US" dirty="0">
+                <a:solidFill>
+                  <a:srgbClr val="000000"/>
+                </a:solidFill>
+                <a:latin typeface="Calibri"/>
+              </a:rPr>
+              <a:t> </a:t>
+            </a:r>
+            <a:r>
+              <a:rPr lang="en-US" dirty="0" err="1">
+                <a:solidFill>
+                  <a:srgbClr val="000000"/>
+                </a:solidFill>
+                <a:latin typeface="Calibri"/>
+              </a:rPr>
+              <a:t>skirtingai</a:t>
+            </a:r>
+            <a:r>
+              <a:rPr lang="en-US" dirty="0">
+                <a:solidFill>
+                  <a:srgbClr val="000000"/>
+                </a:solidFill>
+                <a:latin typeface="Calibri"/>
+              </a:rPr>
+              <a:t>, bet </a:t>
+            </a:r>
+            <a:r>
+              <a:rPr lang="en-US" dirty="0" err="1">
+                <a:solidFill>
+                  <a:srgbClr val="000000"/>
+                </a:solidFill>
+                <a:latin typeface="Calibri"/>
+              </a:rPr>
+              <a:t>šitas</a:t>
+            </a:r>
+            <a:r>
+              <a:rPr lang="en-US" dirty="0">
+                <a:solidFill>
+                  <a:srgbClr val="000000"/>
+                </a:solidFill>
+                <a:latin typeface="Calibri"/>
+              </a:rPr>
+              <a:t> </a:t>
+            </a:r>
+            <a:r>
+              <a:rPr lang="en-US" dirty="0" err="1">
+                <a:solidFill>
+                  <a:srgbClr val="000000"/>
+                </a:solidFill>
+                <a:latin typeface="Calibri"/>
+              </a:rPr>
+              <a:t>modelis</a:t>
+            </a:r>
+            <a:r>
+              <a:rPr lang="en-US" dirty="0">
+                <a:solidFill>
+                  <a:srgbClr val="000000"/>
+                </a:solidFill>
+                <a:latin typeface="Calibri"/>
+              </a:rPr>
+              <a:t> </a:t>
+            </a:r>
+            <a:r>
+              <a:rPr lang="en-US" dirty="0" err="1">
+                <a:solidFill>
+                  <a:srgbClr val="000000"/>
+                </a:solidFill>
+                <a:latin typeface="Calibri"/>
+              </a:rPr>
+              <a:t>atsikartoja</a:t>
+            </a:r>
+            <a:r>
+              <a:rPr lang="en-US" dirty="0">
+                <a:solidFill>
+                  <a:srgbClr val="000000"/>
+                </a:solidFill>
+                <a:latin typeface="Calibri"/>
+              </a:rPr>
+              <a:t> </a:t>
+            </a:r>
+            <a:r>
+              <a:rPr lang="en-US" dirty="0" err="1">
+                <a:solidFill>
+                  <a:srgbClr val="000000"/>
+                </a:solidFill>
+                <a:latin typeface="Calibri"/>
+              </a:rPr>
+              <a:t>visur</a:t>
+            </a:r>
+            <a:r>
+              <a:rPr lang="en-US" dirty="0">
+                <a:solidFill>
+                  <a:srgbClr val="000000"/>
+                </a:solidFill>
+                <a:latin typeface="Calibri"/>
+              </a:rPr>
+              <a:t>.</a:t>
+            </a:r>
+          </a:p>
+          <a:p>
+            <a:endParaRPr lang="en-US" dirty="0"/>
           </a:p>
         </p:txBody>
       </p:sp>
     </p:spTree>
     <p:extLst>
       <p:ext uri="{BB962C8B-B14F-4D97-AF65-F5344CB8AC3E}">
-        <p14:creationId xmlns:p14="http://schemas.microsoft.com/office/powerpoint/2010/main" val="2345601203"/>
+        <p14:creationId xmlns:p14="http://schemas.microsoft.com/office/powerpoint/2010/main" val="2823183192"/>
       </p:ext>
     </p:extLst>
   </p:cSld>
@@ -7010,7 +7010,7 @@
           <p:cNvPr id="2" name="Title 1">
             <a:extLst>
               <a:ext uri="{FF2B5EF4-FFF2-40B4-BE49-F238E27FC236}">
-                <a16:creationId xmlns:a16="http://schemas.microsoft.com/office/drawing/2014/main" id="{60F93BD7-D23A-EE31-428C-6A2E52E70EC1}"/>
+                <a16:creationId xmlns:a16="http://schemas.microsoft.com/office/drawing/2014/main" id="{6CC40B9D-4E72-BB9C-B498-66E6E830BFA1}"/>
               </a:ext>
             </a:extLst>
           </p:cNvPr>
@@ -7027,12 +7027,13 @@
           <a:lstStyle/>
           <a:p>
             <a:r>
-              <a:rPr lang="lt-LT" dirty="0" err="1"/>
-              <a:t>Okey</a:t>
-            </a:r>
-            <a:r>
-              <a:rPr lang="lt-LT" dirty="0"/>
-              <a:t> dabar pabandykit patys</a:t>
+              <a:rPr lang="lt-LT" dirty="0">
+                <a:solidFill>
+                  <a:srgbClr val="000000"/>
+                </a:solidFill>
+                <a:latin typeface="Calibri"/>
+              </a:rPr>
+              <a:t>Kur tai matosi realybėje?</a:t>
             </a:r>
             <a:endParaRPr lang="en-US" dirty="0"/>
           </a:p>
@@ -7043,7 +7044,7 @@
           <p:cNvPr id="3" name="Content Placeholder 2">
             <a:extLst>
               <a:ext uri="{FF2B5EF4-FFF2-40B4-BE49-F238E27FC236}">
-                <a16:creationId xmlns:a16="http://schemas.microsoft.com/office/drawing/2014/main" id="{6783C75D-B828-B3A1-5DA5-801ED6665D67}"/>
+                <a16:creationId xmlns:a16="http://schemas.microsoft.com/office/drawing/2014/main" id="{0AE76D98-84D1-27DD-484F-D1956ABFE4FD}"/>
               </a:ext>
             </a:extLst>
           </p:cNvPr>
@@ -7059,34 +7060,70 @@
           <a:bodyPr/>
           <a:lstStyle/>
           <a:p>
-            <a:r>
-              <a:rPr lang="lt-LT" dirty="0"/>
-              <a:t>Sukurkit programą, kuri </a:t>
-            </a:r>
-            <a:r>
-              <a:rPr lang="lt-LT" dirty="0" err="1"/>
-              <a:t>paiima</a:t>
-            </a:r>
-            <a:r>
-              <a:rPr lang="lt-LT" dirty="0"/>
-              <a:t> </a:t>
-            </a:r>
-            <a:r>
-              <a:rPr lang="en-US" dirty="0"/>
-              <a:t>3 </a:t>
-            </a:r>
-            <a:r>
-              <a:rPr lang="en-US" dirty="0" err="1"/>
-              <a:t>skai</a:t>
-            </a:r>
-            <a:r>
-              <a:rPr lang="lt-LT" dirty="0" err="1"/>
-              <a:t>čius</a:t>
-            </a:r>
-            <a:r>
-              <a:rPr lang="lt-LT" dirty="0"/>
-              <a:t>, juos sudeda, tada paprašo dar vieno skaičiaus ir viską kartu sudaugina</a:t>
-            </a:r>
+            <a:pPr>
+              <a:spcAft>
+                <a:spcPts val="400"/>
+              </a:spcAft>
+            </a:pPr>
+            <a:r>
+              <a:rPr lang="lt-LT" dirty="0">
+                <a:solidFill>
+                  <a:srgbClr val="000000"/>
+                </a:solidFill>
+                <a:latin typeface="Calibri"/>
+              </a:rPr>
+              <a:t> Skaičiuotuvas: skaičiai → veiksmai → atsakymas.</a:t>
+            </a:r>
+          </a:p>
+          <a:p>
+            <a:pPr>
+              <a:spcAft>
+                <a:spcPts val="400"/>
+              </a:spcAft>
+            </a:pPr>
+            <a:r>
+              <a:rPr lang="lt-LT" dirty="0">
+                <a:solidFill>
+                  <a:srgbClr val="000000"/>
+                </a:solidFill>
+                <a:latin typeface="Calibri"/>
+              </a:rPr>
+              <a:t> Žaidimas: žaidėjo veiksmas → taisyklės → pasikeitusi būsena.</a:t>
+            </a:r>
+          </a:p>
+          <a:p>
+            <a:pPr>
+              <a:spcAft>
+                <a:spcPts val="400"/>
+              </a:spcAft>
+            </a:pPr>
+            <a:r>
+              <a:rPr lang="lt-LT" dirty="0">
+                <a:solidFill>
+                  <a:srgbClr val="000000"/>
+                </a:solidFill>
+                <a:latin typeface="Calibri"/>
+              </a:rPr>
+              <a:t> Automatizacija: failai → apdorojimas → sutvarkyti failai.</a:t>
+            </a:r>
+          </a:p>
+          <a:p>
+            <a:pPr>
+              <a:spcAft>
+                <a:spcPts val="400"/>
+              </a:spcAft>
+            </a:pPr>
+            <a:r>
+              <a:rPr lang="lt-LT" dirty="0">
+                <a:solidFill>
+                  <a:srgbClr val="000000"/>
+                </a:solidFill>
+                <a:latin typeface="Calibri"/>
+              </a:rPr>
+              <a:t> Modelis / simuliacija: parametrai → skaičiavimai → prognozė.</a:t>
+            </a:r>
+          </a:p>
+          <a:p>
             <a:endParaRPr lang="en-US" dirty="0"/>
           </a:p>
         </p:txBody>
@@ -7094,7 +7131,7 @@
     </p:spTree>
     <p:extLst>
       <p:ext uri="{BB962C8B-B14F-4D97-AF65-F5344CB8AC3E}">
-        <p14:creationId xmlns:p14="http://schemas.microsoft.com/office/powerpoint/2010/main" val="1410461305"/>
+        <p14:creationId xmlns:p14="http://schemas.microsoft.com/office/powerpoint/2010/main" val="1023334561"/>
       </p:ext>
     </p:extLst>
   </p:cSld>
@@ -7126,7 +7163,7 @@
           <p:cNvPr id="2" name="Title 1">
             <a:extLst>
               <a:ext uri="{FF2B5EF4-FFF2-40B4-BE49-F238E27FC236}">
-                <a16:creationId xmlns:a16="http://schemas.microsoft.com/office/drawing/2014/main" id="{39F9763F-DB20-BF28-4CBB-0ED8B7FC0222}"/>
+                <a16:creationId xmlns:a16="http://schemas.microsoft.com/office/drawing/2014/main" id="{51ED2129-9BED-4AAB-F022-FC8E44EAEB06}"/>
               </a:ext>
             </a:extLst>
           </p:cNvPr>
@@ -7144,7 +7181,15 @@
           <a:p>
             <a:r>
               <a:rPr lang="lt-LT" dirty="0"/>
-              <a:t>Santrauka</a:t>
+              <a:t>Dabar jau </a:t>
+            </a:r>
+            <a:r>
+              <a:rPr lang="lt-LT" dirty="0" err="1"/>
+              <a:t>biški</a:t>
+            </a:r>
+            <a:r>
+              <a:rPr lang="lt-LT" dirty="0"/>
+              <a:t> rimčiau</a:t>
             </a:r>
             <a:endParaRPr lang="en-US" dirty="0"/>
           </a:p>
@@ -7155,7 +7200,7 @@
           <p:cNvPr id="3" name="Content Placeholder 2">
             <a:extLst>
               <a:ext uri="{FF2B5EF4-FFF2-40B4-BE49-F238E27FC236}">
-                <a16:creationId xmlns:a16="http://schemas.microsoft.com/office/drawing/2014/main" id="{E13B5E37-DCB6-7339-428D-57C45F362201}"/>
+                <a16:creationId xmlns:a16="http://schemas.microsoft.com/office/drawing/2014/main" id="{266951E7-0FFF-10CE-F5ED-F90A0AFB1CF2}"/>
               </a:ext>
             </a:extLst>
           </p:cNvPr>
@@ -7171,182 +7216,84 @@
           <a:bodyPr/>
           <a:lstStyle/>
           <a:p>
-            <a:pPr>
-              <a:spcAft>
-                <a:spcPts val="400"/>
-              </a:spcAft>
+            <a:r>
+              <a:rPr lang="lt-LT" dirty="0"/>
+              <a:t>Parašysime kartu programą, kuri paklausia kelių reikšmių</a:t>
+            </a:r>
+          </a:p>
+          <a:p>
+            <a:r>
+              <a:rPr lang="lt-LT" dirty="0"/>
+              <a:t>Programa jas panaudoja skaičiavimui</a:t>
+            </a:r>
+          </a:p>
+          <a:p>
+            <a:r>
+              <a:rPr lang="lt-LT" dirty="0"/>
+              <a:t>Programa aiškiai parodo rezultatą</a:t>
+            </a:r>
+          </a:p>
+          <a:p>
+            <a:pPr marL="0" indent="0">
+              <a:buNone/>
             </a:pPr>
-            <a:r>
-              <a:rPr lang="lt-LT" dirty="0">
-                <a:solidFill>
-                  <a:srgbClr val="000000"/>
-                </a:solidFill>
-                <a:latin typeface="Calibri"/>
-              </a:rPr>
-              <a:t> Programa yra instrukcijų rinkinys.</a:t>
-            </a:r>
-          </a:p>
-          <a:p>
-            <a:pPr>
-              <a:spcAft>
-                <a:spcPts val="400"/>
-              </a:spcAft>
+            <a:endParaRPr lang="lt-LT" dirty="0"/>
+          </a:p>
+          <a:p>
+            <a:pPr marL="0" indent="0">
+              <a:buNone/>
             </a:pPr>
-            <a:r>
-              <a:rPr lang="lt-LT" dirty="0">
-                <a:solidFill>
-                  <a:srgbClr val="000000"/>
-                </a:solidFill>
-                <a:latin typeface="Calibri"/>
-              </a:rPr>
+            <a:endParaRPr lang="lt-LT" dirty="0"/>
+          </a:p>
+          <a:p>
+            <a:pPr marL="0" indent="0">
+              <a:buNone/>
+            </a:pPr>
+            <a:r>
+              <a:rPr lang="lt-LT" dirty="0"/>
+              <a:t>Naudosime:</a:t>
+            </a:r>
+          </a:p>
+          <a:p>
+            <a:pPr marL="0" indent="0">
+              <a:buNone/>
+            </a:pPr>
+            <a:r>
+              <a:rPr lang="en-US" dirty="0"/>
+              <a:t>var = input()</a:t>
+            </a:r>
+          </a:p>
+          <a:p>
+            <a:pPr marL="0" indent="0">
+              <a:buNone/>
+            </a:pPr>
+            <a:r>
+              <a:rPr lang="en-US" dirty="0"/>
+              <a:t>Print(</a:t>
+            </a:r>
+            <a:r>
+              <a:rPr lang="en-US" dirty="0" err="1"/>
+              <a:t>apdorotas</a:t>
+            </a:r>
+            <a:r>
+              <a:rPr lang="en-US" dirty="0"/>
               <a:t> </a:t>
             </a:r>
             <a:r>
-              <a:rPr lang="lt-LT" dirty="0" err="1">
-                <a:solidFill>
-                  <a:srgbClr val="000000"/>
-                </a:solidFill>
-                <a:latin typeface="Calibri"/>
-              </a:rPr>
-              <a:t>Python</a:t>
-            </a:r>
-            <a:r>
-              <a:rPr lang="lt-LT" dirty="0">
-                <a:solidFill>
-                  <a:srgbClr val="000000"/>
-                </a:solidFill>
-                <a:latin typeface="Calibri"/>
-              </a:rPr>
-              <a:t> interpretuoja tas instrukcijas.</a:t>
-            </a:r>
-          </a:p>
-          <a:p>
-            <a:pPr>
-              <a:spcAft>
-                <a:spcPts val="400"/>
-              </a:spcAft>
-            </a:pPr>
-            <a:r>
-              <a:rPr lang="lt-LT" dirty="0">
-                <a:solidFill>
-                  <a:srgbClr val="000000"/>
-                </a:solidFill>
-                <a:latin typeface="Calibri"/>
-              </a:rPr>
-              <a:t> Programa dirba su reikšmėmis.</a:t>
-            </a:r>
-          </a:p>
-          <a:p>
-            <a:pPr>
-              <a:spcAft>
-                <a:spcPts val="400"/>
-              </a:spcAft>
-            </a:pPr>
-            <a:r>
-              <a:rPr lang="lt-LT" dirty="0">
-                <a:solidFill>
-                  <a:srgbClr val="000000"/>
-                </a:solidFill>
-                <a:latin typeface="Calibri"/>
-              </a:rPr>
-              <a:t> Kintamieji leidžia sekti informaciją.</a:t>
-            </a:r>
-          </a:p>
-          <a:p>
-            <a:pPr>
-              <a:spcAft>
-                <a:spcPts val="400"/>
-              </a:spcAft>
-            </a:pPr>
-            <a:r>
-              <a:rPr lang="lt-LT" dirty="0">
-                <a:solidFill>
-                  <a:srgbClr val="000000"/>
-                </a:solidFill>
-                <a:latin typeface="Calibri"/>
-              </a:rPr>
-              <a:t> Operatoriai ir išraiškos leidžia tą informaciją keisti.</a:t>
-            </a:r>
-          </a:p>
-          <a:p>
-            <a:pPr>
-              <a:spcAft>
-                <a:spcPts val="400"/>
-              </a:spcAft>
-            </a:pPr>
-            <a:r>
-              <a:rPr lang="lt-LT" dirty="0">
-                <a:solidFill>
-                  <a:srgbClr val="000000"/>
-                </a:solidFill>
-                <a:latin typeface="Calibri"/>
-              </a:rPr>
-              <a:t> Daug programų galima matyti kaip </a:t>
-            </a:r>
-            <a:r>
-              <a:rPr lang="lt-LT" dirty="0" err="1">
-                <a:solidFill>
-                  <a:srgbClr val="000000"/>
-                </a:solidFill>
-                <a:latin typeface="Calibri"/>
-              </a:rPr>
-              <a:t>input</a:t>
-            </a:r>
-            <a:r>
-              <a:rPr lang="lt-LT" dirty="0">
-                <a:solidFill>
-                  <a:srgbClr val="000000"/>
-                </a:solidFill>
-                <a:latin typeface="Calibri"/>
-              </a:rPr>
-              <a:t> → </a:t>
-            </a:r>
-            <a:r>
-              <a:rPr lang="lt-LT" dirty="0" err="1">
-                <a:solidFill>
-                  <a:srgbClr val="000000"/>
-                </a:solidFill>
-                <a:latin typeface="Calibri"/>
-              </a:rPr>
-              <a:t>processing</a:t>
-            </a:r>
-            <a:r>
-              <a:rPr lang="lt-LT" dirty="0">
-                <a:solidFill>
-                  <a:srgbClr val="000000"/>
-                </a:solidFill>
-                <a:latin typeface="Calibri"/>
-              </a:rPr>
-              <a:t> → </a:t>
-            </a:r>
-            <a:r>
-              <a:rPr lang="lt-LT" dirty="0" err="1">
-                <a:solidFill>
-                  <a:srgbClr val="000000"/>
-                </a:solidFill>
-                <a:latin typeface="Calibri"/>
-              </a:rPr>
-              <a:t>output</a:t>
-            </a:r>
-            <a:r>
-              <a:rPr lang="lt-LT" dirty="0">
-                <a:solidFill>
-                  <a:srgbClr val="000000"/>
-                </a:solidFill>
-                <a:latin typeface="Calibri"/>
-              </a:rPr>
-              <a:t>.</a:t>
-            </a:r>
-          </a:p>
-          <a:p>
-            <a:endParaRPr lang="en-US" dirty="0"/>
+              <a:rPr lang="en-US" dirty="0" err="1"/>
+              <a:t>kintamasis</a:t>
+            </a:r>
+            <a:r>
+              <a:rPr lang="en-US" dirty="0"/>
+              <a:t>)</a:t>
+            </a:r>
           </a:p>
         </p:txBody>
       </p:sp>
     </p:spTree>
     <p:extLst>
       <p:ext uri="{BB962C8B-B14F-4D97-AF65-F5344CB8AC3E}">
-        <p14:creationId xmlns:p14="http://schemas.microsoft.com/office/powerpoint/2010/main" val="2261017476"/>
+        <p14:creationId xmlns:p14="http://schemas.microsoft.com/office/powerpoint/2010/main" val="2345601203"/>
       </p:ext>
     </p:extLst>
   </p:cSld>
@@ -7378,7 +7325,7 @@
           <p:cNvPr id="2" name="Title 1">
             <a:extLst>
               <a:ext uri="{FF2B5EF4-FFF2-40B4-BE49-F238E27FC236}">
-                <a16:creationId xmlns:a16="http://schemas.microsoft.com/office/drawing/2014/main" id="{564F78F2-9E90-44D2-B7F8-0FAB550CEB14}"/>
+                <a16:creationId xmlns:a16="http://schemas.microsoft.com/office/drawing/2014/main" id="{60F93BD7-D23A-EE31-428C-6A2E52E70EC1}"/>
               </a:ext>
             </a:extLst>
           </p:cNvPr>
@@ -7395,8 +7342,12 @@
           <a:lstStyle/>
           <a:p>
             <a:r>
-              <a:rPr lang="lt-LT" dirty="0"/>
-              <a:t>Ar norit daugiau šiandien?</a:t>
+              <a:rPr lang="lt-LT" dirty="0" err="1"/>
+              <a:t>Okey</a:t>
+            </a:r>
+            <a:r>
+              <a:rPr lang="lt-LT" dirty="0"/>
+              <a:t> dabar pabandykit patys</a:t>
             </a:r>
             <a:endParaRPr lang="en-US" dirty="0"/>
           </a:p>
@@ -7407,7 +7358,7 @@
           <p:cNvPr id="3" name="Content Placeholder 2">
             <a:extLst>
               <a:ext uri="{FF2B5EF4-FFF2-40B4-BE49-F238E27FC236}">
-                <a16:creationId xmlns:a16="http://schemas.microsoft.com/office/drawing/2014/main" id="{239AF99A-716A-FC34-C0E3-FF3C98F2FC5F}"/>
+                <a16:creationId xmlns:a16="http://schemas.microsoft.com/office/drawing/2014/main" id="{6783C75D-B828-B3A1-5DA5-801ED6665D67}"/>
               </a:ext>
             </a:extLst>
           </p:cNvPr>
@@ -7423,6 +7374,34 @@
           <a:bodyPr/>
           <a:lstStyle/>
           <a:p>
+            <a:r>
+              <a:rPr lang="lt-LT" dirty="0"/>
+              <a:t>Sukurkit programą, kuri </a:t>
+            </a:r>
+            <a:r>
+              <a:rPr lang="lt-LT" dirty="0" err="1"/>
+              <a:t>paiima</a:t>
+            </a:r>
+            <a:r>
+              <a:rPr lang="lt-LT" dirty="0"/>
+              <a:t> </a:t>
+            </a:r>
+            <a:r>
+              <a:rPr lang="en-US" dirty="0"/>
+              <a:t>3 </a:t>
+            </a:r>
+            <a:r>
+              <a:rPr lang="en-US" dirty="0" err="1"/>
+              <a:t>skai</a:t>
+            </a:r>
+            <a:r>
+              <a:rPr lang="lt-LT" dirty="0" err="1"/>
+              <a:t>čius</a:t>
+            </a:r>
+            <a:r>
+              <a:rPr lang="lt-LT" dirty="0"/>
+              <a:t>, juos sudeda, tada paprašo dar vieno skaičiaus ir viską kartu sudaugina</a:t>
+            </a:r>
             <a:endParaRPr lang="en-US" dirty="0"/>
           </a:p>
         </p:txBody>
@@ -7430,7 +7409,7 @@
     </p:spTree>
     <p:extLst>
       <p:ext uri="{BB962C8B-B14F-4D97-AF65-F5344CB8AC3E}">
-        <p14:creationId xmlns:p14="http://schemas.microsoft.com/office/powerpoint/2010/main" val="502030872"/>
+        <p14:creationId xmlns:p14="http://schemas.microsoft.com/office/powerpoint/2010/main" val="1410461305"/>
       </p:ext>
     </p:extLst>
   </p:cSld>
@@ -7568,6 +7547,342 @@
           <p:cNvPr id="2" name="Title 1">
             <a:extLst>
               <a:ext uri="{FF2B5EF4-FFF2-40B4-BE49-F238E27FC236}">
+                <a16:creationId xmlns:a16="http://schemas.microsoft.com/office/drawing/2014/main" id="{39F9763F-DB20-BF28-4CBB-0ED8B7FC0222}"/>
+              </a:ext>
+            </a:extLst>
+          </p:cNvPr>
+          <p:cNvSpPr>
+            <a:spLocks noGrp="1"/>
+          </p:cNvSpPr>
+          <p:nvPr>
+            <p:ph type="title"/>
+          </p:nvPr>
+        </p:nvSpPr>
+        <p:spPr/>
+        <p:txBody>
+          <a:bodyPr/>
+          <a:lstStyle/>
+          <a:p>
+            <a:r>
+              <a:rPr lang="lt-LT" dirty="0"/>
+              <a:t>Santrauka</a:t>
+            </a:r>
+            <a:endParaRPr lang="en-US" dirty="0"/>
+          </a:p>
+        </p:txBody>
+      </p:sp>
+      <p:sp>
+        <p:nvSpPr>
+          <p:cNvPr id="3" name="Content Placeholder 2">
+            <a:extLst>
+              <a:ext uri="{FF2B5EF4-FFF2-40B4-BE49-F238E27FC236}">
+                <a16:creationId xmlns:a16="http://schemas.microsoft.com/office/drawing/2014/main" id="{E13B5E37-DCB6-7339-428D-57C45F362201}"/>
+              </a:ext>
+            </a:extLst>
+          </p:cNvPr>
+          <p:cNvSpPr>
+            <a:spLocks noGrp="1"/>
+          </p:cNvSpPr>
+          <p:nvPr>
+            <p:ph idx="1"/>
+          </p:nvPr>
+        </p:nvSpPr>
+        <p:spPr/>
+        <p:txBody>
+          <a:bodyPr/>
+          <a:lstStyle/>
+          <a:p>
+            <a:pPr>
+              <a:spcAft>
+                <a:spcPts val="400"/>
+              </a:spcAft>
+            </a:pPr>
+            <a:r>
+              <a:rPr lang="lt-LT" dirty="0">
+                <a:solidFill>
+                  <a:srgbClr val="000000"/>
+                </a:solidFill>
+                <a:latin typeface="Calibri"/>
+              </a:rPr>
+              <a:t> Programa yra instrukcijų rinkinys.</a:t>
+            </a:r>
+          </a:p>
+          <a:p>
+            <a:pPr>
+              <a:spcAft>
+                <a:spcPts val="400"/>
+              </a:spcAft>
+            </a:pPr>
+            <a:r>
+              <a:rPr lang="lt-LT" dirty="0">
+                <a:solidFill>
+                  <a:srgbClr val="000000"/>
+                </a:solidFill>
+                <a:latin typeface="Calibri"/>
+              </a:rPr>
+              <a:t> </a:t>
+            </a:r>
+            <a:r>
+              <a:rPr lang="lt-LT" dirty="0" err="1">
+                <a:solidFill>
+                  <a:srgbClr val="000000"/>
+                </a:solidFill>
+                <a:latin typeface="Calibri"/>
+              </a:rPr>
+              <a:t>Python</a:t>
+            </a:r>
+            <a:r>
+              <a:rPr lang="lt-LT" dirty="0">
+                <a:solidFill>
+                  <a:srgbClr val="000000"/>
+                </a:solidFill>
+                <a:latin typeface="Calibri"/>
+              </a:rPr>
+              <a:t> interpretuoja tas instrukcijas.</a:t>
+            </a:r>
+          </a:p>
+          <a:p>
+            <a:pPr>
+              <a:spcAft>
+                <a:spcPts val="400"/>
+              </a:spcAft>
+            </a:pPr>
+            <a:r>
+              <a:rPr lang="lt-LT" dirty="0">
+                <a:solidFill>
+                  <a:srgbClr val="000000"/>
+                </a:solidFill>
+                <a:latin typeface="Calibri"/>
+              </a:rPr>
+              <a:t> Programa dirba su reikšmėmis.</a:t>
+            </a:r>
+          </a:p>
+          <a:p>
+            <a:pPr>
+              <a:spcAft>
+                <a:spcPts val="400"/>
+              </a:spcAft>
+            </a:pPr>
+            <a:r>
+              <a:rPr lang="lt-LT" dirty="0">
+                <a:solidFill>
+                  <a:srgbClr val="000000"/>
+                </a:solidFill>
+                <a:latin typeface="Calibri"/>
+              </a:rPr>
+              <a:t> Kintamieji leidžia sekti informaciją.</a:t>
+            </a:r>
+          </a:p>
+          <a:p>
+            <a:pPr>
+              <a:spcAft>
+                <a:spcPts val="400"/>
+              </a:spcAft>
+            </a:pPr>
+            <a:r>
+              <a:rPr lang="lt-LT" dirty="0">
+                <a:solidFill>
+                  <a:srgbClr val="000000"/>
+                </a:solidFill>
+                <a:latin typeface="Calibri"/>
+              </a:rPr>
+              <a:t> Operatoriai ir išraiškos leidžia tą informaciją keisti.</a:t>
+            </a:r>
+          </a:p>
+          <a:p>
+            <a:pPr>
+              <a:spcAft>
+                <a:spcPts val="400"/>
+              </a:spcAft>
+            </a:pPr>
+            <a:r>
+              <a:rPr lang="lt-LT" dirty="0">
+                <a:solidFill>
+                  <a:srgbClr val="000000"/>
+                </a:solidFill>
+                <a:latin typeface="Calibri"/>
+              </a:rPr>
+              <a:t> Daug programų galima matyti kaip </a:t>
+            </a:r>
+            <a:r>
+              <a:rPr lang="lt-LT" dirty="0" err="1">
+                <a:solidFill>
+                  <a:srgbClr val="000000"/>
+                </a:solidFill>
+                <a:latin typeface="Calibri"/>
+              </a:rPr>
+              <a:t>input</a:t>
+            </a:r>
+            <a:r>
+              <a:rPr lang="lt-LT" dirty="0">
+                <a:solidFill>
+                  <a:srgbClr val="000000"/>
+                </a:solidFill>
+                <a:latin typeface="Calibri"/>
+              </a:rPr>
+              <a:t> → </a:t>
+            </a:r>
+            <a:r>
+              <a:rPr lang="lt-LT" dirty="0" err="1">
+                <a:solidFill>
+                  <a:srgbClr val="000000"/>
+                </a:solidFill>
+                <a:latin typeface="Calibri"/>
+              </a:rPr>
+              <a:t>processing</a:t>
+            </a:r>
+            <a:r>
+              <a:rPr lang="lt-LT" dirty="0">
+                <a:solidFill>
+                  <a:srgbClr val="000000"/>
+                </a:solidFill>
+                <a:latin typeface="Calibri"/>
+              </a:rPr>
+              <a:t> → </a:t>
+            </a:r>
+            <a:r>
+              <a:rPr lang="lt-LT" dirty="0" err="1">
+                <a:solidFill>
+                  <a:srgbClr val="000000"/>
+                </a:solidFill>
+                <a:latin typeface="Calibri"/>
+              </a:rPr>
+              <a:t>output</a:t>
+            </a:r>
+            <a:r>
+              <a:rPr lang="lt-LT" dirty="0">
+                <a:solidFill>
+                  <a:srgbClr val="000000"/>
+                </a:solidFill>
+                <a:latin typeface="Calibri"/>
+              </a:rPr>
+              <a:t>.</a:t>
+            </a:r>
+          </a:p>
+          <a:p>
+            <a:endParaRPr lang="en-US" dirty="0"/>
+          </a:p>
+        </p:txBody>
+      </p:sp>
+    </p:spTree>
+    <p:extLst>
+      <p:ext uri="{BB962C8B-B14F-4D97-AF65-F5344CB8AC3E}">
+        <p14:creationId xmlns:p14="http://schemas.microsoft.com/office/powerpoint/2010/main" val="2261017476"/>
+      </p:ext>
+    </p:extLst>
+  </p:cSld>
+  <p:clrMapOvr>
+    <a:masterClrMapping/>
+  </p:clrMapOvr>
+</p:sld>
+</file>
+
+<file path=ppt/slides/slide31.xml><?xml version="1.0" encoding="utf-8"?>
+<p:sld xmlns:a="http://schemas.openxmlformats.org/drawingml/2006/main" xmlns:r="http://schemas.openxmlformats.org/officeDocument/2006/relationships" xmlns:p="http://schemas.openxmlformats.org/presentationml/2006/main">
+  <p:cSld>
+    <p:spTree>
+      <p:nvGrpSpPr>
+        <p:cNvPr id="1" name=""/>
+        <p:cNvGrpSpPr/>
+        <p:nvPr/>
+      </p:nvGrpSpPr>
+      <p:grpSpPr>
+        <a:xfrm>
+          <a:off x="0" y="0"/>
+          <a:ext cx="0" cy="0"/>
+          <a:chOff x="0" y="0"/>
+          <a:chExt cx="0" cy="0"/>
+        </a:xfrm>
+      </p:grpSpPr>
+      <p:sp>
+        <p:nvSpPr>
+          <p:cNvPr id="2" name="Title 1">
+            <a:extLst>
+              <a:ext uri="{FF2B5EF4-FFF2-40B4-BE49-F238E27FC236}">
+                <a16:creationId xmlns:a16="http://schemas.microsoft.com/office/drawing/2014/main" id="{564F78F2-9E90-44D2-B7F8-0FAB550CEB14}"/>
+              </a:ext>
+            </a:extLst>
+          </p:cNvPr>
+          <p:cNvSpPr>
+            <a:spLocks noGrp="1"/>
+          </p:cNvSpPr>
+          <p:nvPr>
+            <p:ph type="title"/>
+          </p:nvPr>
+        </p:nvSpPr>
+        <p:spPr/>
+        <p:txBody>
+          <a:bodyPr/>
+          <a:lstStyle/>
+          <a:p>
+            <a:r>
+              <a:rPr lang="lt-LT" dirty="0"/>
+              <a:t>Ar norit daugiau šiandien?</a:t>
+            </a:r>
+            <a:endParaRPr lang="en-US" dirty="0"/>
+          </a:p>
+        </p:txBody>
+      </p:sp>
+      <p:sp>
+        <p:nvSpPr>
+          <p:cNvPr id="3" name="Content Placeholder 2">
+            <a:extLst>
+              <a:ext uri="{FF2B5EF4-FFF2-40B4-BE49-F238E27FC236}">
+                <a16:creationId xmlns:a16="http://schemas.microsoft.com/office/drawing/2014/main" id="{239AF99A-716A-FC34-C0E3-FF3C98F2FC5F}"/>
+              </a:ext>
+            </a:extLst>
+          </p:cNvPr>
+          <p:cNvSpPr>
+            <a:spLocks noGrp="1"/>
+          </p:cNvSpPr>
+          <p:nvPr>
+            <p:ph idx="1"/>
+          </p:nvPr>
+        </p:nvSpPr>
+        <p:spPr/>
+        <p:txBody>
+          <a:bodyPr/>
+          <a:lstStyle/>
+          <a:p>
+            <a:endParaRPr lang="en-US" dirty="0"/>
+          </a:p>
+        </p:txBody>
+      </p:sp>
+    </p:spTree>
+    <p:extLst>
+      <p:ext uri="{BB962C8B-B14F-4D97-AF65-F5344CB8AC3E}">
+        <p14:creationId xmlns:p14="http://schemas.microsoft.com/office/powerpoint/2010/main" val="502030872"/>
+      </p:ext>
+    </p:extLst>
+  </p:cSld>
+  <p:clrMapOvr>
+    <a:masterClrMapping/>
+  </p:clrMapOvr>
+</p:sld>
+</file>
+
+<file path=ppt/slides/slide32.xml><?xml version="1.0" encoding="utf-8"?>
+<p:sld xmlns:a="http://schemas.openxmlformats.org/drawingml/2006/main" xmlns:r="http://schemas.openxmlformats.org/officeDocument/2006/relationships" xmlns:p="http://schemas.openxmlformats.org/presentationml/2006/main">
+  <p:cSld>
+    <p:spTree>
+      <p:nvGrpSpPr>
+        <p:cNvPr id="1" name=""/>
+        <p:cNvGrpSpPr/>
+        <p:nvPr/>
+      </p:nvGrpSpPr>
+      <p:grpSpPr>
+        <a:xfrm>
+          <a:off x="0" y="0"/>
+          <a:ext cx="0" cy="0"/>
+          <a:chOff x="0" y="0"/>
+          <a:chExt cx="0" cy="0"/>
+        </a:xfrm>
+      </p:grpSpPr>
+      <p:sp>
+        <p:nvSpPr>
+          <p:cNvPr id="2" name="Title 1">
+            <a:extLst>
+              <a:ext uri="{FF2B5EF4-FFF2-40B4-BE49-F238E27FC236}">
                 <a16:creationId xmlns:a16="http://schemas.microsoft.com/office/drawing/2014/main" id="{C8BF1411-E01D-34CB-FD07-5BB6D1791F8B}"/>
               </a:ext>
             </a:extLst>
@@ -7742,7 +8057,7 @@
 </p:sld>
 </file>
 
-<file path=ppt/slides/slide31.xml><?xml version="1.0" encoding="utf-8"?>
+<file path=ppt/slides/slide33.xml><?xml version="1.0" encoding="utf-8"?>
 <p:sld xmlns:a="http://schemas.openxmlformats.org/drawingml/2006/main" xmlns:r="http://schemas.openxmlformats.org/officeDocument/2006/relationships" xmlns:p="http://schemas.openxmlformats.org/presentationml/2006/main">
   <p:cSld>
     <p:spTree>
@@ -8011,6 +8326,508 @@
           <p:cNvPr id="2" name="Title 1">
             <a:extLst>
               <a:ext uri="{FF2B5EF4-FFF2-40B4-BE49-F238E27FC236}">
+                <a16:creationId xmlns:a16="http://schemas.microsoft.com/office/drawing/2014/main" id="{C23526F9-B3F8-7516-7710-F4B36A2DA683}"/>
+              </a:ext>
+            </a:extLst>
+          </p:cNvPr>
+          <p:cNvSpPr>
+            <a:spLocks noGrp="1"/>
+          </p:cNvSpPr>
+          <p:nvPr>
+            <p:ph type="title"/>
+          </p:nvPr>
+        </p:nvSpPr>
+        <p:spPr/>
+        <p:txBody>
+          <a:bodyPr/>
+          <a:lstStyle/>
+          <a:p>
+            <a:r>
+              <a:rPr lang="lt-LT" dirty="0"/>
+              <a:t>Apie ką </a:t>
+            </a:r>
+            <a:r>
+              <a:rPr lang="lt-LT" dirty="0" err="1"/>
+              <a:t>yapinsiu</a:t>
+            </a:r>
+            <a:r>
+              <a:rPr lang="lt-LT" dirty="0"/>
+              <a:t> šiandien:</a:t>
+            </a:r>
+            <a:endParaRPr lang="en-US" dirty="0"/>
+          </a:p>
+        </p:txBody>
+      </p:sp>
+      <p:sp>
+        <p:nvSpPr>
+          <p:cNvPr id="3" name="Content Placeholder 2">
+            <a:extLst>
+              <a:ext uri="{FF2B5EF4-FFF2-40B4-BE49-F238E27FC236}">
+                <a16:creationId xmlns:a16="http://schemas.microsoft.com/office/drawing/2014/main" id="{8E9EA2BD-2F28-7422-3682-89038AD94302}"/>
+              </a:ext>
+            </a:extLst>
+          </p:cNvPr>
+          <p:cNvSpPr>
+            <a:spLocks noGrp="1"/>
+          </p:cNvSpPr>
+          <p:nvPr>
+            <p:ph idx="1"/>
+          </p:nvPr>
+        </p:nvSpPr>
+        <p:spPr/>
+        <p:txBody>
+          <a:bodyPr>
+            <a:normAutofit/>
+          </a:bodyPr>
+          <a:lstStyle/>
+          <a:p>
+            <a:r>
+              <a:rPr lang="lt-LT" dirty="0"/>
+              <a:t>Kas apskritai yra programavimas</a:t>
+            </a:r>
+          </a:p>
+          <a:p>
+            <a:r>
+              <a:rPr lang="lt-LT" dirty="0"/>
+              <a:t>Instrukcijos</a:t>
+            </a:r>
+          </a:p>
+          <a:p>
+            <a:r>
+              <a:rPr lang="lt-LT" dirty="0"/>
+              <a:t>Algoritmai</a:t>
+            </a:r>
+          </a:p>
+          <a:p>
+            <a:r>
+              <a:rPr lang="lt-LT" dirty="0" err="1"/>
+              <a:t>Interpreteris</a:t>
+            </a:r>
+            <a:endParaRPr lang="lt-LT" dirty="0"/>
+          </a:p>
+          <a:p>
+            <a:r>
+              <a:rPr lang="lt-LT" dirty="0"/>
+              <a:t>Terminalas</a:t>
+            </a:r>
+          </a:p>
+          <a:p>
+            <a:r>
+              <a:rPr lang="lt-LT" dirty="0"/>
+              <a:t>Kintamieji</a:t>
+            </a:r>
+          </a:p>
+          <a:p>
+            <a:r>
+              <a:rPr lang="lt-LT" dirty="0"/>
+              <a:t>Operatoriai ir </a:t>
+            </a:r>
+            <a:r>
+              <a:rPr lang="lt-LT" dirty="0" err="1"/>
+              <a:t>operandės</a:t>
+            </a:r>
+            <a:endParaRPr lang="lt-LT" dirty="0"/>
+          </a:p>
+          <a:p>
+            <a:r>
+              <a:rPr lang="lt-LT" dirty="0" err="1"/>
+              <a:t>Expresijos</a:t>
+            </a:r>
+            <a:endParaRPr lang="en-US" dirty="0"/>
+          </a:p>
+        </p:txBody>
+      </p:sp>
+      <p:pic>
+        <p:nvPicPr>
+          <p:cNvPr id="4" name="Picture 3" descr="Yes Cat Thumbs Up Sticker - Yes Cat Thumbs Up Thumbs Up - Discover &amp; Share  GIFs">
+            <a:extLst>
+              <a:ext uri="{FF2B5EF4-FFF2-40B4-BE49-F238E27FC236}">
+                <a16:creationId xmlns:a16="http://schemas.microsoft.com/office/drawing/2014/main" id="{F399D88D-70BD-7AA9-332B-F1C07FE88C1D}"/>
+              </a:ext>
+            </a:extLst>
+          </p:cNvPr>
+          <p:cNvPicPr>
+            <a:picLocks noChangeAspect="1"/>
+          </p:cNvPicPr>
+          <p:nvPr/>
+        </p:nvPicPr>
+        <p:blipFill>
+          <a:blip r:embed="rId2"/>
+          <a:stretch>
+            <a:fillRect/>
+          </a:stretch>
+        </p:blipFill>
+        <p:spPr>
+          <a:xfrm flipH="1">
+            <a:off x="6646606" y="1713478"/>
+            <a:ext cx="5545394" cy="5144522"/>
+          </a:xfrm>
+          <a:prstGeom prst="rect">
+            <a:avLst/>
+          </a:prstGeom>
+        </p:spPr>
+      </p:pic>
+    </p:spTree>
+    <p:extLst>
+      <p:ext uri="{BB962C8B-B14F-4D97-AF65-F5344CB8AC3E}">
+        <p14:creationId xmlns:p14="http://schemas.microsoft.com/office/powerpoint/2010/main" val="1305532193"/>
+      </p:ext>
+    </p:extLst>
+  </p:cSld>
+  <p:clrMapOvr>
+    <a:masterClrMapping/>
+  </p:clrMapOvr>
+</p:sld>
+</file>
+
+<file path=ppt/slides/slide6.xml><?xml version="1.0" encoding="utf-8"?>
+<p:sld xmlns:a="http://schemas.openxmlformats.org/drawingml/2006/main" xmlns:r="http://schemas.openxmlformats.org/officeDocument/2006/relationships" xmlns:p="http://schemas.openxmlformats.org/presentationml/2006/main">
+  <p:cSld>
+    <p:spTree>
+      <p:nvGrpSpPr>
+        <p:cNvPr id="1" name=""/>
+        <p:cNvGrpSpPr/>
+        <p:nvPr/>
+      </p:nvGrpSpPr>
+      <p:grpSpPr>
+        <a:xfrm>
+          <a:off x="0" y="0"/>
+          <a:ext cx="0" cy="0"/>
+          <a:chOff x="0" y="0"/>
+          <a:chExt cx="0" cy="0"/>
+        </a:xfrm>
+      </p:grpSpPr>
+      <p:sp>
+        <p:nvSpPr>
+          <p:cNvPr id="2" name="Title 1">
+            <a:extLst>
+              <a:ext uri="{FF2B5EF4-FFF2-40B4-BE49-F238E27FC236}">
+                <a16:creationId xmlns:a16="http://schemas.microsoft.com/office/drawing/2014/main" id="{6849B50E-A13F-EBF0-6907-B158D0865F97}"/>
+              </a:ext>
+            </a:extLst>
+          </p:cNvPr>
+          <p:cNvSpPr>
+            <a:spLocks noGrp="1"/>
+          </p:cNvSpPr>
+          <p:nvPr>
+            <p:ph type="title"/>
+          </p:nvPr>
+        </p:nvSpPr>
+        <p:spPr/>
+        <p:txBody>
+          <a:bodyPr/>
+          <a:lstStyle/>
+          <a:p>
+            <a:r>
+              <a:rPr lang="lt-LT" dirty="0"/>
+              <a:t>Ir pati programa</a:t>
+            </a:r>
+            <a:endParaRPr lang="en-US" dirty="0"/>
+          </a:p>
+        </p:txBody>
+      </p:sp>
+      <p:sp>
+        <p:nvSpPr>
+          <p:cNvPr id="3" name="Content Placeholder 2">
+            <a:extLst>
+              <a:ext uri="{FF2B5EF4-FFF2-40B4-BE49-F238E27FC236}">
+                <a16:creationId xmlns:a16="http://schemas.microsoft.com/office/drawing/2014/main" id="{49EDAB9B-B2B7-F94B-E468-C6D262E70418}"/>
+              </a:ext>
+            </a:extLst>
+          </p:cNvPr>
+          <p:cNvSpPr>
+            <a:spLocks noGrp="1"/>
+          </p:cNvSpPr>
+          <p:nvPr>
+            <p:ph idx="1"/>
+          </p:nvPr>
+        </p:nvSpPr>
+        <p:spPr>
+          <a:xfrm>
+            <a:off x="838200" y="1825625"/>
+            <a:ext cx="10515600" cy="4667250"/>
+          </a:xfrm>
+        </p:spPr>
+        <p:txBody>
+          <a:bodyPr>
+            <a:normAutofit fontScale="85000" lnSpcReduction="10000"/>
+          </a:bodyPr>
+          <a:lstStyle/>
+          <a:p>
+            <a:r>
+              <a:rPr lang="lt-LT" dirty="0"/>
+              <a:t>ID</a:t>
+            </a:r>
+            <a:r>
+              <a:rPr lang="en-US" dirty="0"/>
+              <a:t>E, </a:t>
+            </a:r>
+            <a:r>
+              <a:rPr lang="en-US" dirty="0" err="1"/>
+              <a:t>Darbas</a:t>
+            </a:r>
+            <a:r>
+              <a:rPr lang="en-US" dirty="0"/>
+              <a:t> </a:t>
+            </a:r>
+            <a:r>
+              <a:rPr lang="en-US" dirty="0" err="1"/>
+              <a:t>su</a:t>
+            </a:r>
+            <a:r>
+              <a:rPr lang="en-US" dirty="0"/>
+              <a:t> </a:t>
+            </a:r>
+            <a:r>
+              <a:rPr lang="en-US" dirty="0" err="1"/>
+              <a:t>duomenim</a:t>
+            </a:r>
+            <a:r>
+              <a:rPr lang="en-US" dirty="0"/>
+              <a:t> </a:t>
+            </a:r>
+            <a:r>
+              <a:rPr lang="en-US" dirty="0" err="1"/>
+              <a:t>ir</a:t>
+            </a:r>
+            <a:r>
+              <a:rPr lang="en-US" dirty="0"/>
+              <a:t> </a:t>
+            </a:r>
+            <a:r>
+              <a:rPr lang="en-US" dirty="0" err="1"/>
+              <a:t>programavimo</a:t>
+            </a:r>
+            <a:r>
+              <a:rPr lang="en-US" dirty="0"/>
+              <a:t> </a:t>
+            </a:r>
+            <a:r>
+              <a:rPr lang="en-US" dirty="0" err="1"/>
+              <a:t>logika</a:t>
+            </a:r>
+            <a:r>
+              <a:rPr lang="en-US" dirty="0"/>
+              <a:t> (</a:t>
+            </a:r>
+            <a:r>
+              <a:rPr lang="en-US" dirty="0" err="1"/>
+              <a:t>jei</a:t>
+            </a:r>
+            <a:r>
+              <a:rPr lang="en-US" dirty="0"/>
+              <a:t> statements </a:t>
+            </a:r>
+            <a:r>
+              <a:rPr lang="en-US" dirty="0" err="1"/>
+              <a:t>ir</a:t>
+            </a:r>
+            <a:r>
+              <a:rPr lang="en-US" dirty="0"/>
+              <a:t> </a:t>
+            </a:r>
+            <a:r>
+              <a:rPr lang="en-US" dirty="0" err="1"/>
+              <a:t>loopai</a:t>
+            </a:r>
+            <a:r>
+              <a:rPr lang="en-US" dirty="0"/>
+              <a:t>)</a:t>
+            </a:r>
+          </a:p>
+          <a:p>
+            <a:r>
+              <a:rPr lang="en-US" dirty="0" err="1"/>
+              <a:t>Funkcijos</a:t>
+            </a:r>
+            <a:r>
+              <a:rPr lang="en-US" dirty="0"/>
+              <a:t> id j</a:t>
+            </a:r>
+            <a:r>
+              <a:rPr lang="lt-LT" dirty="0"/>
+              <a:t>ų dekompozicija, </a:t>
+            </a:r>
+            <a:r>
+              <a:rPr lang="lt-LT" dirty="0" err="1"/>
+              <a:t>github</a:t>
+            </a:r>
+            <a:r>
+              <a:rPr lang="lt-LT" dirty="0"/>
+              <a:t>, parametrai, </a:t>
+            </a:r>
+            <a:r>
+              <a:rPr lang="lt-LT" dirty="0" err="1"/>
+              <a:t>return</a:t>
+            </a:r>
+            <a:r>
+              <a:rPr lang="lt-LT" dirty="0"/>
+              <a:t> </a:t>
+            </a:r>
+            <a:r>
+              <a:rPr lang="lt-LT" dirty="0" err="1"/>
+              <a:t>values</a:t>
+            </a:r>
+            <a:r>
+              <a:rPr lang="lt-LT" dirty="0"/>
+              <a:t>, </a:t>
+            </a:r>
+            <a:r>
+              <a:rPr lang="lt-LT" dirty="0" err="1"/>
+              <a:t>scope</a:t>
+            </a:r>
+            <a:r>
+              <a:rPr lang="lt-LT" dirty="0"/>
+              <a:t>...</a:t>
+            </a:r>
+          </a:p>
+          <a:p>
+            <a:r>
+              <a:rPr lang="lt-LT" dirty="0"/>
+              <a:t>Sudėtingesni duomenų tipai ir darbai su jais</a:t>
+            </a:r>
+          </a:p>
+          <a:p>
+            <a:r>
+              <a:rPr lang="lt-LT" dirty="0"/>
+              <a:t>Duomenų struktūravimas, programos </a:t>
+            </a:r>
+            <a:r>
+              <a:rPr lang="lt-LT" dirty="0" err="1"/>
+              <a:t>state</a:t>
+            </a:r>
+            <a:r>
+              <a:rPr lang="lt-LT" dirty="0"/>
+              <a:t> ir </a:t>
+            </a:r>
+            <a:r>
+              <a:rPr lang="lt-LT" dirty="0" err="1"/>
+              <a:t>naming</a:t>
+            </a:r>
+            <a:r>
+              <a:rPr lang="lt-LT" dirty="0"/>
+              <a:t> </a:t>
+            </a:r>
+            <a:r>
+              <a:rPr lang="lt-LT" dirty="0" err="1"/>
+              <a:t>convention</a:t>
+            </a:r>
+            <a:r>
+              <a:rPr lang="lt-LT" dirty="0"/>
+              <a:t>.</a:t>
+            </a:r>
+          </a:p>
+          <a:p>
+            <a:r>
+              <a:rPr lang="lt-LT" dirty="0"/>
+              <a:t>Klasės</a:t>
+            </a:r>
+          </a:p>
+          <a:p>
+            <a:r>
+              <a:rPr lang="lt-LT" dirty="0"/>
+              <a:t>Darbo automatizacija</a:t>
+            </a:r>
+          </a:p>
+          <a:p>
+            <a:r>
+              <a:rPr lang="lt-LT" dirty="0"/>
+              <a:t>Žaidimai ir kitos temos, programavimo filosofijos, sudėtingesni programavimo </a:t>
+            </a:r>
+            <a:r>
+              <a:rPr lang="lt-LT" dirty="0" err="1"/>
+              <a:t>kospektai</a:t>
+            </a:r>
+            <a:r>
+              <a:rPr lang="lt-LT" dirty="0"/>
+              <a:t>, kurias galit pasiūlyt, nes </a:t>
+            </a:r>
+            <a:r>
+              <a:rPr lang="lt-LT" dirty="0" err="1"/>
+              <a:t>basicai</a:t>
+            </a:r>
+            <a:r>
+              <a:rPr lang="lt-LT" dirty="0"/>
+              <a:t> baigiasi čia</a:t>
+            </a:r>
+          </a:p>
+          <a:p>
+            <a:r>
+              <a:rPr lang="lt-LT" dirty="0" err="1"/>
+              <a:t>Build</a:t>
+            </a:r>
+            <a:r>
+              <a:rPr lang="lt-LT" dirty="0"/>
+              <a:t> </a:t>
+            </a:r>
+            <a:r>
+              <a:rPr lang="lt-LT" dirty="0" err="1"/>
+              <a:t>your</a:t>
+            </a:r>
+            <a:r>
+              <a:rPr lang="lt-LT" dirty="0"/>
+              <a:t> </a:t>
+            </a:r>
+            <a:r>
+              <a:rPr lang="lt-LT" dirty="0" err="1"/>
+              <a:t>own</a:t>
+            </a:r>
+            <a:r>
+              <a:rPr lang="lt-LT" dirty="0"/>
+              <a:t> X, programavimo specializacija...</a:t>
+            </a:r>
+          </a:p>
+          <a:p>
+            <a:r>
+              <a:rPr lang="lt-LT" dirty="0"/>
+              <a:t>Nu ir jei netingėsiu galėsim tęsti ir sulėtinti tempą ir mokintis kažką labiau </a:t>
+            </a:r>
+            <a:r>
+              <a:rPr lang="lt-LT" dirty="0" err="1"/>
+              <a:t>advanced</a:t>
+            </a:r>
+            <a:r>
+              <a:rPr lang="lt-LT" dirty="0"/>
+              <a:t>.</a:t>
+            </a:r>
+          </a:p>
+        </p:txBody>
+      </p:sp>
+    </p:spTree>
+    <p:extLst>
+      <p:ext uri="{BB962C8B-B14F-4D97-AF65-F5344CB8AC3E}">
+        <p14:creationId xmlns:p14="http://schemas.microsoft.com/office/powerpoint/2010/main" val="1095879041"/>
+      </p:ext>
+    </p:extLst>
+  </p:cSld>
+  <p:clrMapOvr>
+    <a:masterClrMapping/>
+  </p:clrMapOvr>
+</p:sld>
+</file>
+
+<file path=ppt/slides/slide7.xml><?xml version="1.0" encoding="utf-8"?>
+<p:sld xmlns:a="http://schemas.openxmlformats.org/drawingml/2006/main" xmlns:r="http://schemas.openxmlformats.org/officeDocument/2006/relationships" xmlns:p="http://schemas.openxmlformats.org/presentationml/2006/main">
+  <p:cSld>
+    <p:spTree>
+      <p:nvGrpSpPr>
+        <p:cNvPr id="1" name=""/>
+        <p:cNvGrpSpPr/>
+        <p:nvPr/>
+      </p:nvGrpSpPr>
+      <p:grpSpPr>
+        <a:xfrm>
+          <a:off x="0" y="0"/>
+          <a:ext cx="0" cy="0"/>
+          <a:chOff x="0" y="0"/>
+          <a:chExt cx="0" cy="0"/>
+        </a:xfrm>
+      </p:grpSpPr>
+      <p:sp>
+        <p:nvSpPr>
+          <p:cNvPr id="2" name="Title 1">
+            <a:extLst>
+              <a:ext uri="{FF2B5EF4-FFF2-40B4-BE49-F238E27FC236}">
                 <a16:creationId xmlns:a16="http://schemas.microsoft.com/office/drawing/2014/main" id="{366C2DA6-4368-791F-D668-607F7CDB2E66}"/>
               </a:ext>
             </a:extLst>
@@ -8092,7 +8909,7 @@
 </p:sld>
 </file>
 
-<file path=ppt/slides/slide6.xml><?xml version="1.0" encoding="utf-8"?>
+<file path=ppt/slides/slide8.xml><?xml version="1.0" encoding="utf-8"?>
 <p:sld xmlns:a="http://schemas.openxmlformats.org/drawingml/2006/main" xmlns:r="http://schemas.openxmlformats.org/officeDocument/2006/relationships" xmlns:p="http://schemas.openxmlformats.org/presentationml/2006/main">
   <p:cSld>
     <p:spTree>
@@ -8381,7 +9198,7 @@
 </p:sld>
 </file>
 
-<file path=ppt/slides/slide7.xml><?xml version="1.0" encoding="utf-8"?>
+<file path=ppt/slides/slide9.xml><?xml version="1.0" encoding="utf-8"?>
 <p:sld xmlns:a="http://schemas.openxmlformats.org/drawingml/2006/main" xmlns:r="http://schemas.openxmlformats.org/officeDocument/2006/relationships" xmlns:p="http://schemas.openxmlformats.org/presentationml/2006/main">
   <p:cSld>
     <p:spTree>
@@ -8614,309 +9431,6 @@
       </p:par>
     </p:tnLst>
   </p:timing>
-</p:sld>
-</file>
-
-<file path=ppt/slides/slide8.xml><?xml version="1.0" encoding="utf-8"?>
-<p:sld xmlns:a="http://schemas.openxmlformats.org/drawingml/2006/main" xmlns:r="http://schemas.openxmlformats.org/officeDocument/2006/relationships" xmlns:p="http://schemas.openxmlformats.org/presentationml/2006/main">
-  <p:cSld>
-    <p:spTree>
-      <p:nvGrpSpPr>
-        <p:cNvPr id="1" name=""/>
-        <p:cNvGrpSpPr/>
-        <p:nvPr/>
-      </p:nvGrpSpPr>
-      <p:grpSpPr>
-        <a:xfrm>
-          <a:off x="0" y="0"/>
-          <a:ext cx="0" cy="0"/>
-          <a:chOff x="0" y="0"/>
-          <a:chExt cx="0" cy="0"/>
-        </a:xfrm>
-      </p:grpSpPr>
-      <p:sp>
-        <p:nvSpPr>
-          <p:cNvPr id="2" name="Title 1">
-            <a:extLst>
-              <a:ext uri="{FF2B5EF4-FFF2-40B4-BE49-F238E27FC236}">
-                <a16:creationId xmlns:a16="http://schemas.microsoft.com/office/drawing/2014/main" id="{77709626-6427-3436-F32E-48D5E279B3D1}"/>
-              </a:ext>
-            </a:extLst>
-          </p:cNvPr>
-          <p:cNvSpPr>
-            <a:spLocks noGrp="1"/>
-          </p:cNvSpPr>
-          <p:nvPr>
-            <p:ph type="title"/>
-          </p:nvPr>
-        </p:nvSpPr>
-        <p:spPr/>
-        <p:txBody>
-          <a:bodyPr/>
-          <a:lstStyle/>
-          <a:p>
-            <a:r>
-              <a:rPr lang="lt-LT" dirty="0"/>
-              <a:t>Keli esminiai terminai, prieš judant toliau</a:t>
-            </a:r>
-            <a:endParaRPr lang="en-US" dirty="0"/>
-          </a:p>
-        </p:txBody>
-      </p:sp>
-      <p:sp>
-        <p:nvSpPr>
-          <p:cNvPr id="3" name="Content Placeholder 2">
-            <a:extLst>
-              <a:ext uri="{FF2B5EF4-FFF2-40B4-BE49-F238E27FC236}">
-                <a16:creationId xmlns:a16="http://schemas.microsoft.com/office/drawing/2014/main" id="{B93375FC-7F4C-0EBA-AF6F-8C848C4B5F0D}"/>
-              </a:ext>
-            </a:extLst>
-          </p:cNvPr>
-          <p:cNvSpPr>
-            <a:spLocks noGrp="1"/>
-          </p:cNvSpPr>
-          <p:nvPr>
-            <p:ph idx="1"/>
-          </p:nvPr>
-        </p:nvSpPr>
-        <p:spPr/>
-        <p:txBody>
-          <a:bodyPr/>
-          <a:lstStyle/>
-          <a:p>
-            <a:r>
-              <a:rPr lang="lt-LT" dirty="0"/>
-              <a:t>Instrukcija – kažkas ką liepi kompiuteriui daryti</a:t>
-            </a:r>
-          </a:p>
-          <a:p>
-            <a:r>
-              <a:rPr lang="lt-LT" dirty="0"/>
-              <a:t>Algoritmas – žingsnių rinkinys skirtas išspręsti problemai</a:t>
-            </a:r>
-          </a:p>
-          <a:p>
-            <a:r>
-              <a:rPr lang="lt-LT" dirty="0"/>
-              <a:t>Programa – instrukcijos parašytos kalba kurią kompiuteris gali suprasti ir jas vykdyti.</a:t>
-            </a:r>
-          </a:p>
-          <a:p>
-            <a:r>
-              <a:rPr lang="lt-LT" dirty="0" err="1"/>
-              <a:t>Kompiluoti</a:t>
-            </a:r>
-            <a:r>
-              <a:rPr lang="lt-LT" dirty="0"/>
-              <a:t> – surinkti visas instrukcijas ir jas sudėlioti taip, kad kompiuteris galėtų jas suprasti.</a:t>
-            </a:r>
-          </a:p>
-          <a:p>
-            <a:r>
-              <a:rPr lang="lt-LT" dirty="0" err="1"/>
-              <a:t>Source</a:t>
-            </a:r>
-            <a:r>
-              <a:rPr lang="lt-LT" dirty="0"/>
-              <a:t> kodas – </a:t>
-            </a:r>
-            <a:r>
-              <a:rPr lang="lt-LT" dirty="0" err="1"/>
-              <a:t>Nekompliuotas</a:t>
-            </a:r>
-            <a:r>
-              <a:rPr lang="lt-LT" dirty="0"/>
-              <a:t> instrukcijų rinkinys, kurį rašo programuotojai.</a:t>
-            </a:r>
-            <a:endParaRPr lang="en-US" dirty="0"/>
-          </a:p>
-        </p:txBody>
-      </p:sp>
-    </p:spTree>
-    <p:extLst>
-      <p:ext uri="{BB962C8B-B14F-4D97-AF65-F5344CB8AC3E}">
-        <p14:creationId xmlns:p14="http://schemas.microsoft.com/office/powerpoint/2010/main" val="4232621549"/>
-      </p:ext>
-    </p:extLst>
-  </p:cSld>
-  <p:clrMapOvr>
-    <a:masterClrMapping/>
-  </p:clrMapOvr>
-</p:sld>
-</file>
-
-<file path=ppt/slides/slide9.xml><?xml version="1.0" encoding="utf-8"?>
-<p:sld xmlns:a="http://schemas.openxmlformats.org/drawingml/2006/main" xmlns:r="http://schemas.openxmlformats.org/officeDocument/2006/relationships" xmlns:p="http://schemas.openxmlformats.org/presentationml/2006/main">
-  <p:cSld>
-    <p:spTree>
-      <p:nvGrpSpPr>
-        <p:cNvPr id="1" name=""/>
-        <p:cNvGrpSpPr/>
-        <p:nvPr/>
-      </p:nvGrpSpPr>
-      <p:grpSpPr>
-        <a:xfrm>
-          <a:off x="0" y="0"/>
-          <a:ext cx="0" cy="0"/>
-          <a:chOff x="0" y="0"/>
-          <a:chExt cx="0" cy="0"/>
-        </a:xfrm>
-      </p:grpSpPr>
-      <p:sp>
-        <p:nvSpPr>
-          <p:cNvPr id="2" name="Title 1">
-            <a:extLst>
-              <a:ext uri="{FF2B5EF4-FFF2-40B4-BE49-F238E27FC236}">
-                <a16:creationId xmlns:a16="http://schemas.microsoft.com/office/drawing/2014/main" id="{CC3B7C2F-545F-C22A-B8F5-E13443C090F8}"/>
-              </a:ext>
-            </a:extLst>
-          </p:cNvPr>
-          <p:cNvSpPr>
-            <a:spLocks noGrp="1"/>
-          </p:cNvSpPr>
-          <p:nvPr>
-            <p:ph type="title"/>
-          </p:nvPr>
-        </p:nvSpPr>
-        <p:spPr/>
-        <p:txBody>
-          <a:bodyPr/>
-          <a:lstStyle/>
-          <a:p>
-            <a:r>
-              <a:rPr lang="lt-LT" dirty="0"/>
-              <a:t>Kas vyksta kai mes paleidžiame programą kompiuteryje?</a:t>
-            </a:r>
-            <a:endParaRPr lang="en-US" dirty="0"/>
-          </a:p>
-        </p:txBody>
-      </p:sp>
-      <p:sp>
-        <p:nvSpPr>
-          <p:cNvPr id="3" name="Content Placeholder 2">
-            <a:extLst>
-              <a:ext uri="{FF2B5EF4-FFF2-40B4-BE49-F238E27FC236}">
-                <a16:creationId xmlns:a16="http://schemas.microsoft.com/office/drawing/2014/main" id="{1D909074-BC32-F6B5-111D-D8681FFCD36A}"/>
-              </a:ext>
-            </a:extLst>
-          </p:cNvPr>
-          <p:cNvSpPr>
-            <a:spLocks noGrp="1"/>
-          </p:cNvSpPr>
-          <p:nvPr>
-            <p:ph idx="1"/>
-          </p:nvPr>
-        </p:nvSpPr>
-        <p:spPr/>
-        <p:txBody>
-          <a:bodyPr>
-            <a:normAutofit fontScale="92500" lnSpcReduction="10000"/>
-          </a:bodyPr>
-          <a:lstStyle/>
-          <a:p>
-            <a:r>
-              <a:rPr lang="lt-LT" dirty="0"/>
-              <a:t>Paprasčiausias modelis kurį reikėtų turėti galvoje yra:</a:t>
-            </a:r>
-          </a:p>
-          <a:p>
-            <a:endParaRPr lang="lt-LT" dirty="0"/>
-          </a:p>
-          <a:p>
-            <a:pPr marL="0" indent="0">
-              <a:buNone/>
-            </a:pPr>
-            <a:r>
-              <a:rPr lang="lt-LT" dirty="0" err="1"/>
-              <a:t>Source</a:t>
-            </a:r>
-            <a:r>
-              <a:rPr lang="lt-LT" dirty="0"/>
-              <a:t> kodas </a:t>
-            </a:r>
-          </a:p>
-          <a:p>
-            <a:pPr marL="0" indent="0">
-              <a:buNone/>
-            </a:pPr>
-            <a:r>
-              <a:rPr lang="en-US" dirty="0"/>
-              <a:t>↓</a:t>
-            </a:r>
-            <a:endParaRPr lang="lt-LT" dirty="0"/>
-          </a:p>
-          <a:p>
-            <a:pPr marL="0" indent="0">
-              <a:buNone/>
-            </a:pPr>
-            <a:r>
-              <a:rPr lang="lt-LT" dirty="0" err="1"/>
-              <a:t>Pythonas</a:t>
-            </a:r>
-            <a:r>
-              <a:rPr lang="lt-LT" dirty="0"/>
-              <a:t> perskaito ir interpretuoja instrukcijas (</a:t>
-            </a:r>
-            <a:r>
-              <a:rPr lang="lt-LT" dirty="0" err="1"/>
-              <a:t>kompiluoja</a:t>
-            </a:r>
-            <a:r>
-              <a:rPr lang="lt-LT" dirty="0"/>
-              <a:t> jas kompiuteriui suprantama kalba)</a:t>
-            </a:r>
-          </a:p>
-          <a:p>
-            <a:pPr marL="0" indent="0">
-              <a:buNone/>
-            </a:pPr>
-            <a:r>
-              <a:rPr lang="en-US" dirty="0"/>
-              <a:t>↓</a:t>
-            </a:r>
-            <a:endParaRPr lang="lt-LT" dirty="0"/>
-          </a:p>
-          <a:p>
-            <a:pPr marL="0" indent="0">
-              <a:buNone/>
-            </a:pPr>
-            <a:r>
-              <a:rPr lang="lt-LT" dirty="0"/>
-              <a:t> Kompiuteris vykdo instrukcijas</a:t>
-            </a:r>
-          </a:p>
-          <a:p>
-            <a:pPr marL="0" indent="0">
-              <a:buNone/>
-            </a:pPr>
-            <a:r>
-              <a:rPr lang="en-US" dirty="0"/>
-              <a:t>↓</a:t>
-            </a:r>
-            <a:endParaRPr lang="lt-LT" dirty="0"/>
-          </a:p>
-          <a:p>
-            <a:pPr marL="0" indent="0">
-              <a:buNone/>
-            </a:pPr>
-            <a:r>
-              <a:rPr lang="lt-LT" dirty="0"/>
-              <a:t> Kažkas įvyksta</a:t>
-            </a:r>
-            <a:endParaRPr lang="en-US" dirty="0"/>
-          </a:p>
-        </p:txBody>
-      </p:sp>
-    </p:spTree>
-    <p:extLst>
-      <p:ext uri="{BB962C8B-B14F-4D97-AF65-F5344CB8AC3E}">
-        <p14:creationId xmlns:p14="http://schemas.microsoft.com/office/powerpoint/2010/main" val="1036092298"/>
-      </p:ext>
-    </p:extLst>
-  </p:cSld>
-  <p:clrMapOvr>
-    <a:masterClrMapping/>
-  </p:clrMapOvr>
 </p:sld>
 </file>
 
